--- a/MPI-AlphaS.pptx
+++ b/MPI-AlphaS.pptx
@@ -5,18 +5,23 @@
     <p:sldMasterId id="2147483648" r:id="rId1"/>
   </p:sldMasterIdLst>
   <p:notesMasterIdLst>
-    <p:notesMasterId r:id="rId11"/>
+    <p:notesMasterId r:id="rId16"/>
   </p:notesMasterIdLst>
   <p:sldIdLst>
     <p:sldId id="495" r:id="rId2"/>
     <p:sldId id="497" r:id="rId3"/>
-    <p:sldId id="499" r:id="rId4"/>
+    <p:sldId id="509" r:id="rId4"/>
     <p:sldId id="500" r:id="rId5"/>
-    <p:sldId id="498" r:id="rId6"/>
+    <p:sldId id="499" r:id="rId6"/>
     <p:sldId id="501" r:id="rId7"/>
     <p:sldId id="502" r:id="rId8"/>
     <p:sldId id="504" r:id="rId9"/>
-    <p:sldId id="503" r:id="rId10"/>
+    <p:sldId id="507" r:id="rId10"/>
+    <p:sldId id="508" r:id="rId11"/>
+    <p:sldId id="503" r:id="rId12"/>
+    <p:sldId id="505" r:id="rId13"/>
+    <p:sldId id="498" r:id="rId14"/>
+    <p:sldId id="506" r:id="rId15"/>
   </p:sldIdLst>
   <p:sldSz cx="12192000" cy="6858000"/>
   <p:notesSz cx="6858000" cy="9144000"/>
@@ -205,7 +210,7 @@
           <a:p>
             <a:fld id="{3AF20C66-05F9-4FC2-8866-8533A9375BA8}" type="datetimeFigureOut">
               <a:rPr lang="en-GB" smtClean="0"/>
-              <a:t>11/11/2025</a:t>
+              <a:t>14/11/2025</a:t>
             </a:fld>
             <a:endParaRPr lang="en-GB"/>
           </a:p>
@@ -604,7 +609,7 @@
           <a:p>
             <a:fld id="{D9F3A2CB-D467-4583-BEBA-5A75E3413D57}" type="datetimeFigureOut">
               <a:rPr lang="en-IN" smtClean="0"/>
-              <a:t>11-11-2025</a:t>
+              <a:t>14-11-2025</a:t>
             </a:fld>
             <a:endParaRPr lang="en-IN"/>
           </a:p>
@@ -774,7 +779,7 @@
           <a:p>
             <a:fld id="{D9F3A2CB-D467-4583-BEBA-5A75E3413D57}" type="datetimeFigureOut">
               <a:rPr lang="en-IN" smtClean="0"/>
-              <a:t>11-11-2025</a:t>
+              <a:t>14-11-2025</a:t>
             </a:fld>
             <a:endParaRPr lang="en-IN"/>
           </a:p>
@@ -954,7 +959,7 @@
           <a:p>
             <a:fld id="{D9F3A2CB-D467-4583-BEBA-5A75E3413D57}" type="datetimeFigureOut">
               <a:rPr lang="en-IN" smtClean="0"/>
-              <a:t>11-11-2025</a:t>
+              <a:t>14-11-2025</a:t>
             </a:fld>
             <a:endParaRPr lang="en-IN"/>
           </a:p>
@@ -1124,7 +1129,7 @@
           <a:p>
             <a:fld id="{D9F3A2CB-D467-4583-BEBA-5A75E3413D57}" type="datetimeFigureOut">
               <a:rPr lang="en-IN" smtClean="0"/>
-              <a:t>11-11-2025</a:t>
+              <a:t>14-11-2025</a:t>
             </a:fld>
             <a:endParaRPr lang="en-IN"/>
           </a:p>
@@ -1370,7 +1375,7 @@
           <a:p>
             <a:fld id="{D9F3A2CB-D467-4583-BEBA-5A75E3413D57}" type="datetimeFigureOut">
               <a:rPr lang="en-IN" smtClean="0"/>
-              <a:t>11-11-2025</a:t>
+              <a:t>14-11-2025</a:t>
             </a:fld>
             <a:endParaRPr lang="en-IN"/>
           </a:p>
@@ -1602,7 +1607,7 @@
           <a:p>
             <a:fld id="{D9F3A2CB-D467-4583-BEBA-5A75E3413D57}" type="datetimeFigureOut">
               <a:rPr lang="en-IN" smtClean="0"/>
-              <a:t>11-11-2025</a:t>
+              <a:t>14-11-2025</a:t>
             </a:fld>
             <a:endParaRPr lang="en-IN"/>
           </a:p>
@@ -1969,7 +1974,7 @@
           <a:p>
             <a:fld id="{D9F3A2CB-D467-4583-BEBA-5A75E3413D57}" type="datetimeFigureOut">
               <a:rPr lang="en-IN" smtClean="0"/>
-              <a:t>11-11-2025</a:t>
+              <a:t>14-11-2025</a:t>
             </a:fld>
             <a:endParaRPr lang="en-IN"/>
           </a:p>
@@ -2087,7 +2092,7 @@
           <a:p>
             <a:fld id="{D9F3A2CB-D467-4583-BEBA-5A75E3413D57}" type="datetimeFigureOut">
               <a:rPr lang="en-IN" smtClean="0"/>
-              <a:t>11-11-2025</a:t>
+              <a:t>14-11-2025</a:t>
             </a:fld>
             <a:endParaRPr lang="en-IN"/>
           </a:p>
@@ -2182,7 +2187,7 @@
           <a:p>
             <a:fld id="{D9F3A2CB-D467-4583-BEBA-5A75E3413D57}" type="datetimeFigureOut">
               <a:rPr lang="en-IN" smtClean="0"/>
-              <a:t>11-11-2025</a:t>
+              <a:t>14-11-2025</a:t>
             </a:fld>
             <a:endParaRPr lang="en-IN"/>
           </a:p>
@@ -2459,7 +2464,7 @@
           <a:p>
             <a:fld id="{D9F3A2CB-D467-4583-BEBA-5A75E3413D57}" type="datetimeFigureOut">
               <a:rPr lang="en-IN" smtClean="0"/>
-              <a:t>11-11-2025</a:t>
+              <a:t>14-11-2025</a:t>
             </a:fld>
             <a:endParaRPr lang="en-IN"/>
           </a:p>
@@ -2712,7 +2717,7 @@
           <a:p>
             <a:fld id="{D9F3A2CB-D467-4583-BEBA-5A75E3413D57}" type="datetimeFigureOut">
               <a:rPr lang="en-IN" smtClean="0"/>
-              <a:t>11-11-2025</a:t>
+              <a:t>14-11-2025</a:t>
             </a:fld>
             <a:endParaRPr lang="en-IN"/>
           </a:p>
@@ -2925,7 +2930,7 @@
           <a:p>
             <a:fld id="{D9F3A2CB-D467-4583-BEBA-5A75E3413D57}" type="datetimeFigureOut">
               <a:rPr lang="en-IN" smtClean="0"/>
-              <a:t>11-11-2025</a:t>
+              <a:t>14-11-2025</a:t>
             </a:fld>
             <a:endParaRPr lang="en-IN"/>
           </a:p>
@@ -3338,6 +3343,58 @@
       </p:grpSpPr>
       <p:sp>
         <p:nvSpPr>
+          <p:cNvPr id="2" name="Rectangle 1">
+            <a:extLst>
+              <a:ext uri="{FF2B5EF4-FFF2-40B4-BE49-F238E27FC236}">
+                <a16:creationId xmlns:a16="http://schemas.microsoft.com/office/drawing/2014/main" id="{AD2F0146-C64F-15D5-C270-548AA273FE47}"/>
+              </a:ext>
+            </a:extLst>
+          </p:cNvPr>
+          <p:cNvSpPr/>
+          <p:nvPr/>
+        </p:nvSpPr>
+        <p:spPr>
+          <a:xfrm>
+            <a:off x="0" y="0"/>
+            <a:ext cx="12192000" cy="6858000"/>
+          </a:xfrm>
+          <a:prstGeom prst="rect">
+            <a:avLst/>
+          </a:prstGeom>
+          <a:solidFill>
+            <a:srgbClr val="990000"/>
+          </a:solidFill>
+          <a:ln>
+            <a:noFill/>
+          </a:ln>
+        </p:spPr>
+        <p:style>
+          <a:lnRef idx="2">
+            <a:schemeClr val="accent1">
+              <a:shade val="15000"/>
+            </a:schemeClr>
+          </a:lnRef>
+          <a:fillRef idx="1">
+            <a:schemeClr val="accent1"/>
+          </a:fillRef>
+          <a:effectRef idx="0">
+            <a:schemeClr val="accent1"/>
+          </a:effectRef>
+          <a:fontRef idx="minor">
+            <a:schemeClr val="lt1"/>
+          </a:fontRef>
+        </p:style>
+        <p:txBody>
+          <a:bodyPr rtlCol="0" anchor="ctr"/>
+          <a:lstStyle/>
+          <a:p>
+            <a:pPr algn="ctr"/>
+            <a:endParaRPr lang="en-GB"/>
+          </a:p>
+        </p:txBody>
+      </p:sp>
+      <p:sp>
+        <p:nvSpPr>
           <p:cNvPr id="5" name="Title 3">
             <a:extLst>
               <a:ext uri="{FF2B5EF4-FFF2-40B4-BE49-F238E27FC236}">
@@ -3352,7 +3409,7 @@
         </p:nvSpPr>
         <p:spPr>
           <a:xfrm>
-            <a:off x="200829" y="344910"/>
+            <a:off x="200829" y="541680"/>
             <a:ext cx="11790342" cy="6316320"/>
           </a:xfrm>
           <a:prstGeom prst="rect">
@@ -3388,50 +3445,14 @@
                 <a:spcPct val="100000"/>
               </a:lnSpc>
             </a:pPr>
-            <a:r>
-              <a:rPr lang="en-US" sz="5400" b="1" dirty="0">
-                <a:solidFill>
-                  <a:srgbClr val="C00000"/>
-                </a:solidFill>
-                <a:latin typeface="Times New Roman" panose="02020603050405020304" pitchFamily="18" charset="0"/>
-                <a:ea typeface="Arial Unicode MS" panose="020B0604020202020204" pitchFamily="34" charset="-128"/>
-                <a:cs typeface="Times New Roman" panose="02020603050405020304" pitchFamily="18" charset="0"/>
-              </a:rPr>
-              <a:t>Extraction of </a:t>
-            </a:r>
-            <a:r>
-              <a:rPr lang="el-GR" sz="5400" b="1" dirty="0">
-                <a:solidFill>
-                  <a:srgbClr val="C00000"/>
-                </a:solidFill>
-                <a:latin typeface="Times New Roman" panose="02020603050405020304" pitchFamily="18" charset="0"/>
-                <a:ea typeface="Arial Unicode MS" panose="020B0604020202020204" pitchFamily="34" charset="-128"/>
-                <a:cs typeface="Times New Roman" panose="02020603050405020304" pitchFamily="18" charset="0"/>
-              </a:rPr>
-              <a:t>α</a:t>
-            </a:r>
-            <a:r>
-              <a:rPr lang="en-US" sz="5400" b="1" baseline="-25000" dirty="0">
-                <a:solidFill>
-                  <a:srgbClr val="C00000"/>
-                </a:solidFill>
-                <a:latin typeface="Times New Roman" panose="02020603050405020304" pitchFamily="18" charset="0"/>
-                <a:ea typeface="Arial Unicode MS" panose="020B0604020202020204" pitchFamily="34" charset="-128"/>
-                <a:cs typeface="Times New Roman" panose="02020603050405020304" pitchFamily="18" charset="0"/>
-              </a:rPr>
-              <a:t>s</a:t>
-            </a:r>
-            <a:r>
-              <a:rPr lang="en-US" sz="5400" b="1" dirty="0">
-                <a:solidFill>
-                  <a:srgbClr val="C00000"/>
-                </a:solidFill>
-                <a:latin typeface="Times New Roman" panose="02020603050405020304" pitchFamily="18" charset="0"/>
-                <a:ea typeface="Arial Unicode MS" panose="020B0604020202020204" pitchFamily="34" charset="-128"/>
-                <a:cs typeface="Times New Roman" panose="02020603050405020304" pitchFamily="18" charset="0"/>
-              </a:rPr>
-              <a:t> </a:t>
-            </a:r>
+            <a:endParaRPr lang="en-US" sz="5400" b="1" dirty="0">
+              <a:solidFill>
+                <a:schemeClr val="bg1"/>
+              </a:solidFill>
+              <a:latin typeface="Times New Roman" panose="02020603050405020304" pitchFamily="18" charset="0"/>
+              <a:ea typeface="Arial Unicode MS" panose="020B0604020202020204" pitchFamily="34" charset="-128"/>
+              <a:cs typeface="Times New Roman" panose="02020603050405020304" pitchFamily="18" charset="0"/>
+            </a:endParaRPr>
           </a:p>
           <a:p>
             <a:pPr algn="ctr">
@@ -3439,17 +3460,14 @@
                 <a:spcPct val="100000"/>
               </a:lnSpc>
             </a:pPr>
-            <a:r>
-              <a:rPr lang="en-US" sz="5400" b="1" dirty="0">
-                <a:solidFill>
-                  <a:srgbClr val="C00000"/>
-                </a:solidFill>
-                <a:latin typeface="Times New Roman" panose="02020603050405020304" pitchFamily="18" charset="0"/>
-                <a:ea typeface="Arial Unicode MS" panose="020B0604020202020204" pitchFamily="34" charset="-128"/>
-                <a:cs typeface="Times New Roman" panose="02020603050405020304" pitchFamily="18" charset="0"/>
-              </a:rPr>
-              <a:t>from Event Shapes</a:t>
-            </a:r>
+            <a:endParaRPr lang="en-US" sz="5400" b="1" dirty="0">
+              <a:solidFill>
+                <a:schemeClr val="bg1"/>
+              </a:solidFill>
+              <a:latin typeface="Times New Roman" panose="02020603050405020304" pitchFamily="18" charset="0"/>
+              <a:ea typeface="Arial Unicode MS" panose="020B0604020202020204" pitchFamily="34" charset="-128"/>
+              <a:cs typeface="Times New Roman" panose="02020603050405020304" pitchFamily="18" charset="0"/>
+            </a:endParaRPr>
           </a:p>
           <a:p>
             <a:pPr algn="ctr">
@@ -3457,14 +3475,14 @@
                 <a:spcPct val="100000"/>
               </a:lnSpc>
             </a:pPr>
-            <a:r>
-              <a:rPr lang="en-US" sz="4800" b="1" dirty="0">
-                <a:latin typeface="Times New Roman" panose="02020603050405020304" pitchFamily="18" charset="0"/>
-                <a:ea typeface="Arial Unicode MS" panose="020B0604020202020204" pitchFamily="34" charset="-128"/>
-                <a:cs typeface="Times New Roman" panose="02020603050405020304" pitchFamily="18" charset="0"/>
-              </a:rPr>
-              <a:t> </a:t>
-            </a:r>
+            <a:endParaRPr lang="en-US" sz="5400" b="1" dirty="0">
+              <a:solidFill>
+                <a:schemeClr val="bg1"/>
+              </a:solidFill>
+              <a:latin typeface="Times New Roman" panose="02020603050405020304" pitchFamily="18" charset="0"/>
+              <a:ea typeface="Arial Unicode MS" panose="020B0604020202020204" pitchFamily="34" charset="-128"/>
+              <a:cs typeface="Times New Roman" panose="02020603050405020304" pitchFamily="18" charset="0"/>
+            </a:endParaRPr>
           </a:p>
           <a:p>
             <a:pPr algn="ctr">
@@ -3473,7 +3491,97 @@
               </a:lnSpc>
             </a:pPr>
             <a:r>
+              <a:rPr lang="en-US" sz="5400" b="1" dirty="0">
+                <a:solidFill>
+                  <a:schemeClr val="bg1"/>
+                </a:solidFill>
+                <a:latin typeface="Times New Roman" panose="02020603050405020304" pitchFamily="18" charset="0"/>
+                <a:ea typeface="Arial Unicode MS" panose="020B0604020202020204" pitchFamily="34" charset="-128"/>
+                <a:cs typeface="Times New Roman" panose="02020603050405020304" pitchFamily="18" charset="0"/>
+              </a:rPr>
+              <a:t>Determination of </a:t>
+            </a:r>
+            <a:r>
+              <a:rPr lang="el-GR" sz="5400" b="1" dirty="0">
+                <a:solidFill>
+                  <a:schemeClr val="bg1"/>
+                </a:solidFill>
+                <a:latin typeface="Times New Roman" panose="02020603050405020304" pitchFamily="18" charset="0"/>
+                <a:ea typeface="Arial Unicode MS" panose="020B0604020202020204" pitchFamily="34" charset="-128"/>
+                <a:cs typeface="Times New Roman" panose="02020603050405020304" pitchFamily="18" charset="0"/>
+              </a:rPr>
+              <a:t>α</a:t>
+            </a:r>
+            <a:r>
+              <a:rPr lang="en-US" sz="5400" b="1" baseline="-25000" dirty="0">
+                <a:solidFill>
+                  <a:schemeClr val="bg1"/>
+                </a:solidFill>
+                <a:latin typeface="Times New Roman" panose="02020603050405020304" pitchFamily="18" charset="0"/>
+                <a:ea typeface="Arial Unicode MS" panose="020B0604020202020204" pitchFamily="34" charset="-128"/>
+                <a:cs typeface="Times New Roman" panose="02020603050405020304" pitchFamily="18" charset="0"/>
+              </a:rPr>
+              <a:t>s</a:t>
+            </a:r>
+            <a:r>
+              <a:rPr lang="en-US" sz="5400" b="1" dirty="0">
+                <a:solidFill>
+                  <a:schemeClr val="bg1"/>
+                </a:solidFill>
+                <a:latin typeface="Times New Roman" panose="02020603050405020304" pitchFamily="18" charset="0"/>
+                <a:ea typeface="Arial Unicode MS" panose="020B0604020202020204" pitchFamily="34" charset="-128"/>
+                <a:cs typeface="Times New Roman" panose="02020603050405020304" pitchFamily="18" charset="0"/>
+              </a:rPr>
+              <a:t> </a:t>
+            </a:r>
+          </a:p>
+          <a:p>
+            <a:pPr algn="ctr">
+              <a:lnSpc>
+                <a:spcPct val="100000"/>
+              </a:lnSpc>
+            </a:pPr>
+            <a:r>
+              <a:rPr lang="en-US" sz="5400" b="1" dirty="0">
+                <a:solidFill>
+                  <a:schemeClr val="bg1"/>
+                </a:solidFill>
+                <a:latin typeface="Times New Roman" panose="02020603050405020304" pitchFamily="18" charset="0"/>
+                <a:ea typeface="Arial Unicode MS" panose="020B0604020202020204" pitchFamily="34" charset="-128"/>
+                <a:cs typeface="Times New Roman" panose="02020603050405020304" pitchFamily="18" charset="0"/>
+              </a:rPr>
+              <a:t>from Event Shapes</a:t>
+            </a:r>
+          </a:p>
+          <a:p>
+            <a:pPr algn="ctr">
+              <a:lnSpc>
+                <a:spcPct val="100000"/>
+              </a:lnSpc>
+            </a:pPr>
+            <a:r>
+              <a:rPr lang="en-US" sz="4800" b="1" dirty="0">
+                <a:solidFill>
+                  <a:schemeClr val="bg1"/>
+                </a:solidFill>
+                <a:latin typeface="Times New Roman" panose="02020603050405020304" pitchFamily="18" charset="0"/>
+                <a:ea typeface="Arial Unicode MS" panose="020B0604020202020204" pitchFamily="34" charset="-128"/>
+                <a:cs typeface="Times New Roman" panose="02020603050405020304" pitchFamily="18" charset="0"/>
+              </a:rPr>
+              <a:t> </a:t>
+            </a:r>
+          </a:p>
+          <a:p>
+            <a:pPr algn="ctr">
+              <a:lnSpc>
+                <a:spcPct val="100000"/>
+              </a:lnSpc>
+            </a:pPr>
+            <a:r>
               <a:rPr lang="en-US" sz="2800" dirty="0">
+                <a:solidFill>
+                  <a:schemeClr val="bg1"/>
+                </a:solidFill>
                 <a:latin typeface="Times New Roman" panose="02020603050405020304" pitchFamily="18" charset="0"/>
                 <a:ea typeface="Arial Unicode MS" panose="020B0604020202020204" pitchFamily="34" charset="-128"/>
                 <a:cs typeface="Times New Roman" panose="02020603050405020304" pitchFamily="18" charset="0"/>
@@ -3482,6 +3590,9 @@
             </a:r>
             <a:r>
               <a:rPr lang="en-US" sz="2800" baseline="30000" dirty="0">
+                <a:solidFill>
+                  <a:schemeClr val="bg1"/>
+                </a:solidFill>
                 <a:latin typeface="Times New Roman" panose="02020603050405020304" pitchFamily="18" charset="0"/>
                 <a:ea typeface="Arial Unicode MS" panose="020B0604020202020204" pitchFamily="34" charset="-128"/>
                 <a:cs typeface="Times New Roman" panose="02020603050405020304" pitchFamily="18" charset="0"/>
@@ -3490,6 +3601,9 @@
             </a:r>
             <a:r>
               <a:rPr lang="en-US" sz="2800" dirty="0">
+                <a:solidFill>
+                  <a:schemeClr val="bg1"/>
+                </a:solidFill>
                 <a:latin typeface="Times New Roman" panose="02020603050405020304" pitchFamily="18" charset="0"/>
                 <a:ea typeface="Arial Unicode MS" panose="020B0604020202020204" pitchFamily="34" charset="-128"/>
                 <a:cs typeface="Times New Roman" panose="02020603050405020304" pitchFamily="18" charset="0"/>
@@ -3504,6 +3618,9 @@
               </a:lnSpc>
             </a:pPr>
             <a:endParaRPr lang="en-US" sz="4800" b="1" dirty="0">
+              <a:solidFill>
+                <a:schemeClr val="bg1"/>
+              </a:solidFill>
               <a:latin typeface="Times New Roman" panose="02020603050405020304" pitchFamily="18" charset="0"/>
               <a:ea typeface="Arial Unicode MS" panose="020B0604020202020204" pitchFamily="34" charset="-128"/>
               <a:cs typeface="Times New Roman" panose="02020603050405020304" pitchFamily="18" charset="0"/>
@@ -3516,6 +3633,9 @@
               </a:lnSpc>
             </a:pPr>
             <a:endParaRPr lang="en-US" sz="4800" b="1" dirty="0">
+              <a:solidFill>
+                <a:schemeClr val="bg1"/>
+              </a:solidFill>
               <a:latin typeface="Times New Roman" panose="02020603050405020304" pitchFamily="18" charset="0"/>
               <a:ea typeface="Arial Unicode MS" panose="020B0604020202020204" pitchFamily="34" charset="-128"/>
               <a:cs typeface="Times New Roman" panose="02020603050405020304" pitchFamily="18" charset="0"/>
@@ -3528,6 +3648,9 @@
               </a:lnSpc>
             </a:pPr>
             <a:endParaRPr lang="en-IN" sz="4800" b="1" dirty="0">
+              <a:solidFill>
+                <a:schemeClr val="bg1"/>
+              </a:solidFill>
               <a:latin typeface="Times New Roman" panose="02020603050405020304" pitchFamily="18" charset="0"/>
               <a:ea typeface="Arial Unicode MS" panose="020B0604020202020204" pitchFamily="34" charset="-128"/>
               <a:cs typeface="Times New Roman" panose="02020603050405020304" pitchFamily="18" charset="0"/>
@@ -3539,6 +3662,1111 @@
     <p:extLst>
       <p:ext uri="{BB962C8B-B14F-4D97-AF65-F5344CB8AC3E}">
         <p14:creationId xmlns:p14="http://schemas.microsoft.com/office/powerpoint/2010/main" val="4149263245"/>
+      </p:ext>
+    </p:extLst>
+  </p:cSld>
+  <p:clrMapOvr>
+    <a:masterClrMapping/>
+  </p:clrMapOvr>
+</p:sld>
+</file>
+
+<file path=ppt/slides/slide10.xml><?xml version="1.0" encoding="utf-8"?>
+<p:sld xmlns:a="http://schemas.openxmlformats.org/drawingml/2006/main" xmlns:r="http://schemas.openxmlformats.org/officeDocument/2006/relationships" xmlns:p="http://schemas.openxmlformats.org/presentationml/2006/main">
+  <p:cSld>
+    <p:spTree>
+      <p:nvGrpSpPr>
+        <p:cNvPr id="1" name="">
+          <a:extLst>
+            <a:ext uri="{FF2B5EF4-FFF2-40B4-BE49-F238E27FC236}">
+              <a16:creationId xmlns:a16="http://schemas.microsoft.com/office/drawing/2014/main" id="{E6153D06-DDC4-8841-EF32-3494315F3661}"/>
+            </a:ext>
+          </a:extLst>
+        </p:cNvPr>
+        <p:cNvGrpSpPr/>
+        <p:nvPr/>
+      </p:nvGrpSpPr>
+      <p:grpSpPr>
+        <a:xfrm>
+          <a:off x="0" y="0"/>
+          <a:ext cx="0" cy="0"/>
+          <a:chOff x="0" y="0"/>
+          <a:chExt cx="0" cy="0"/>
+        </a:xfrm>
+      </p:grpSpPr>
+      <p:sp>
+        <p:nvSpPr>
+          <p:cNvPr id="5" name="Title 4">
+            <a:extLst>
+              <a:ext uri="{FF2B5EF4-FFF2-40B4-BE49-F238E27FC236}">
+                <a16:creationId xmlns:a16="http://schemas.microsoft.com/office/drawing/2014/main" id="{CC0B32A7-1408-4075-E684-95C3F9E53B1A}"/>
+              </a:ext>
+            </a:extLst>
+          </p:cNvPr>
+          <p:cNvSpPr>
+            <a:spLocks noGrp="1"/>
+          </p:cNvSpPr>
+          <p:nvPr>
+            <p:ph type="title"/>
+          </p:nvPr>
+        </p:nvSpPr>
+        <p:spPr>
+          <a:xfrm>
+            <a:off x="206476" y="188780"/>
+            <a:ext cx="11804610" cy="766916"/>
+          </a:xfrm>
+        </p:spPr>
+        <p:txBody>
+          <a:bodyPr>
+            <a:normAutofit/>
+          </a:bodyPr>
+          <a:lstStyle/>
+          <a:p>
+            <a:r>
+              <a:rPr lang="en-US" sz="2800" b="1" dirty="0">
+                <a:latin typeface="Times New Roman" panose="02020603050405020304" pitchFamily="18" charset="0"/>
+                <a:ea typeface="Arial Unicode MS" panose="020B0604020202020204" pitchFamily="34" charset="-128"/>
+                <a:cs typeface="Times New Roman" panose="02020603050405020304" pitchFamily="18" charset="0"/>
+              </a:rPr>
+              <a:t>Summary of results</a:t>
+            </a:r>
+            <a:endParaRPr lang="en-IN" sz="2800" b="1" baseline="-25000" dirty="0">
+              <a:latin typeface="Times New Roman" panose="02020603050405020304" pitchFamily="18" charset="0"/>
+              <a:ea typeface="Arial Unicode MS" panose="020B0604020202020204" pitchFamily="34" charset="-128"/>
+              <a:cs typeface="Times New Roman" panose="02020603050405020304" pitchFamily="18" charset="0"/>
+            </a:endParaRPr>
+          </a:p>
+        </p:txBody>
+      </p:sp>
+      <p:pic>
+        <p:nvPicPr>
+          <p:cNvPr id="2" name="Picture 1">
+            <a:extLst>
+              <a:ext uri="{FF2B5EF4-FFF2-40B4-BE49-F238E27FC236}">
+                <a16:creationId xmlns:a16="http://schemas.microsoft.com/office/drawing/2014/main" id="{335ADAEE-B51F-5F81-317E-B3497BF228A8}"/>
+              </a:ext>
+            </a:extLst>
+          </p:cNvPr>
+          <p:cNvPicPr>
+            <a:picLocks noChangeAspect="1"/>
+          </p:cNvPicPr>
+          <p:nvPr/>
+        </p:nvPicPr>
+        <p:blipFill>
+          <a:blip r:embed="rId2"/>
+          <a:stretch>
+            <a:fillRect/>
+          </a:stretch>
+        </p:blipFill>
+        <p:spPr>
+          <a:xfrm>
+            <a:off x="354647" y="1623387"/>
+            <a:ext cx="6060580" cy="3888310"/>
+          </a:xfrm>
+          <a:prstGeom prst="rect">
+            <a:avLst/>
+          </a:prstGeom>
+        </p:spPr>
+      </p:pic>
+      <p:pic>
+        <p:nvPicPr>
+          <p:cNvPr id="3" name="Picture 2" descr="A graph of a function&#10;&#10;AI-generated content may be incorrect.">
+            <a:extLst>
+              <a:ext uri="{FF2B5EF4-FFF2-40B4-BE49-F238E27FC236}">
+                <a16:creationId xmlns:a16="http://schemas.microsoft.com/office/drawing/2014/main" id="{245C9054-D671-B63D-3B05-8634CCA01037}"/>
+              </a:ext>
+            </a:extLst>
+          </p:cNvPr>
+          <p:cNvPicPr>
+            <a:picLocks noChangeAspect="1"/>
+          </p:cNvPicPr>
+          <p:nvPr/>
+        </p:nvPicPr>
+        <p:blipFill>
+          <a:blip r:embed="rId3" cstate="print">
+            <a:extLst>
+              <a:ext uri="{28A0092B-C50C-407E-A947-70E740481C1C}">
+                <a14:useLocalDpi xmlns:a14="http://schemas.microsoft.com/office/drawing/2010/main" val="0"/>
+              </a:ext>
+            </a:extLst>
+          </a:blip>
+          <a:stretch>
+            <a:fillRect/>
+          </a:stretch>
+        </p:blipFill>
+        <p:spPr>
+          <a:xfrm>
+            <a:off x="7349924" y="446976"/>
+            <a:ext cx="4278713" cy="6241131"/>
+          </a:xfrm>
+          <a:prstGeom prst="rect">
+            <a:avLst/>
+          </a:prstGeom>
+        </p:spPr>
+      </p:pic>
+    </p:spTree>
+    <p:extLst>
+      <p:ext uri="{BB962C8B-B14F-4D97-AF65-F5344CB8AC3E}">
+        <p14:creationId xmlns:p14="http://schemas.microsoft.com/office/powerpoint/2010/main" val="902988740"/>
+      </p:ext>
+    </p:extLst>
+  </p:cSld>
+  <p:clrMapOvr>
+    <a:masterClrMapping/>
+  </p:clrMapOvr>
+</p:sld>
+</file>
+
+<file path=ppt/slides/slide11.xml><?xml version="1.0" encoding="utf-8"?>
+<p:sld xmlns:a="http://schemas.openxmlformats.org/drawingml/2006/main" xmlns:r="http://schemas.openxmlformats.org/officeDocument/2006/relationships" xmlns:p="http://schemas.openxmlformats.org/presentationml/2006/main">
+  <p:cSld>
+    <p:spTree>
+      <p:nvGrpSpPr>
+        <p:cNvPr id="1" name="">
+          <a:extLst>
+            <a:ext uri="{FF2B5EF4-FFF2-40B4-BE49-F238E27FC236}">
+              <a16:creationId xmlns:a16="http://schemas.microsoft.com/office/drawing/2014/main" id="{257A479A-62CE-DC6E-749F-0503909776FF}"/>
+            </a:ext>
+          </a:extLst>
+        </p:cNvPr>
+        <p:cNvGrpSpPr/>
+        <p:nvPr/>
+      </p:nvGrpSpPr>
+      <p:grpSpPr>
+        <a:xfrm>
+          <a:off x="0" y="0"/>
+          <a:ext cx="0" cy="0"/>
+          <a:chOff x="0" y="0"/>
+          <a:chExt cx="0" cy="0"/>
+        </a:xfrm>
+      </p:grpSpPr>
+      <p:sp>
+        <p:nvSpPr>
+          <p:cNvPr id="5" name="Title 4">
+            <a:extLst>
+              <a:ext uri="{FF2B5EF4-FFF2-40B4-BE49-F238E27FC236}">
+                <a16:creationId xmlns:a16="http://schemas.microsoft.com/office/drawing/2014/main" id="{506A551D-4ACA-0242-CF27-CC4BAC06B98D}"/>
+              </a:ext>
+            </a:extLst>
+          </p:cNvPr>
+          <p:cNvSpPr>
+            <a:spLocks noGrp="1"/>
+          </p:cNvSpPr>
+          <p:nvPr>
+            <p:ph type="title"/>
+          </p:nvPr>
+        </p:nvSpPr>
+        <p:spPr>
+          <a:xfrm>
+            <a:off x="206476" y="188780"/>
+            <a:ext cx="11804610" cy="766916"/>
+          </a:xfrm>
+        </p:spPr>
+        <p:txBody>
+          <a:bodyPr>
+            <a:normAutofit/>
+          </a:bodyPr>
+          <a:lstStyle/>
+          <a:p>
+            <a:r>
+              <a:rPr lang="en-US" sz="2800" b="1" dirty="0">
+                <a:latin typeface="Times New Roman" panose="02020603050405020304" pitchFamily="18" charset="0"/>
+                <a:ea typeface="Arial Unicode MS" panose="020B0604020202020204" pitchFamily="34" charset="-128"/>
+                <a:cs typeface="Times New Roman" panose="02020603050405020304" pitchFamily="18" charset="0"/>
+              </a:rPr>
+              <a:t>Summary of questions</a:t>
+            </a:r>
+            <a:endParaRPr lang="en-IN" sz="2800" b="1" dirty="0">
+              <a:latin typeface="Times New Roman" panose="02020603050405020304" pitchFamily="18" charset="0"/>
+              <a:ea typeface="Arial Unicode MS" panose="020B0604020202020204" pitchFamily="34" charset="-128"/>
+              <a:cs typeface="Times New Roman" panose="02020603050405020304" pitchFamily="18" charset="0"/>
+            </a:endParaRPr>
+          </a:p>
+        </p:txBody>
+      </p:sp>
+      <p:sp>
+        <p:nvSpPr>
+          <p:cNvPr id="6" name="Content Placeholder 5">
+            <a:extLst>
+              <a:ext uri="{FF2B5EF4-FFF2-40B4-BE49-F238E27FC236}">
+                <a16:creationId xmlns:a16="http://schemas.microsoft.com/office/drawing/2014/main" id="{C5E1CD0A-8113-9427-0839-D10BBC30F2B2}"/>
+              </a:ext>
+            </a:extLst>
+          </p:cNvPr>
+          <p:cNvSpPr>
+            <a:spLocks noGrp="1"/>
+          </p:cNvSpPr>
+          <p:nvPr>
+            <p:ph idx="1"/>
+          </p:nvPr>
+        </p:nvSpPr>
+        <p:spPr>
+          <a:xfrm>
+            <a:off x="206475" y="1064608"/>
+            <a:ext cx="7068213" cy="5571142"/>
+          </a:xfrm>
+        </p:spPr>
+        <p:txBody>
+          <a:bodyPr>
+            <a:noAutofit/>
+          </a:bodyPr>
+          <a:lstStyle/>
+          <a:p>
+            <a:pPr>
+              <a:spcAft>
+                <a:spcPts val="600"/>
+              </a:spcAft>
+            </a:pPr>
+            <a:r>
+              <a:rPr lang="en-US" sz="1400" dirty="0">
+                <a:latin typeface="Times New Roman" panose="02020603050405020304" pitchFamily="18" charset="0"/>
+                <a:ea typeface="Arial Unicode MS" panose="020B0604020202020204" pitchFamily="34" charset="-128"/>
+                <a:cs typeface="Times New Roman" panose="02020603050405020304" pitchFamily="18" charset="0"/>
+              </a:rPr>
+              <a:t>Are there potential issues with the overall procedure in general?</a:t>
+            </a:r>
+            <a:endParaRPr lang="en-US" sz="1400" dirty="0">
+              <a:solidFill>
+                <a:srgbClr val="C00000"/>
+              </a:solidFill>
+              <a:latin typeface="Times New Roman" panose="02020603050405020304" pitchFamily="18" charset="0"/>
+              <a:ea typeface="Arial Unicode MS" panose="020B0604020202020204" pitchFamily="34" charset="-128"/>
+              <a:cs typeface="Times New Roman" panose="02020603050405020304" pitchFamily="18" charset="0"/>
+            </a:endParaRPr>
+          </a:p>
+          <a:p>
+            <a:pPr>
+              <a:spcAft>
+                <a:spcPts val="600"/>
+              </a:spcAft>
+            </a:pPr>
+            <a:r>
+              <a:rPr lang="en-US" sz="1400" dirty="0">
+                <a:latin typeface="Times New Roman" panose="02020603050405020304" pitchFamily="18" charset="0"/>
+                <a:ea typeface="Arial Unicode MS" panose="020B0604020202020204" pitchFamily="34" charset="-128"/>
+                <a:cs typeface="Times New Roman" panose="02020603050405020304" pitchFamily="18" charset="0"/>
+              </a:rPr>
+              <a:t>Is it correct to use the same theory coefficients (A,B,C) for fitting at all energy levels?</a:t>
+            </a:r>
+          </a:p>
+          <a:p>
+            <a:pPr>
+              <a:spcAft>
+                <a:spcPts val="600"/>
+              </a:spcAft>
+            </a:pPr>
+            <a:r>
+              <a:rPr lang="en-US" sz="1400" dirty="0">
+                <a:latin typeface="Times New Roman" panose="02020603050405020304" pitchFamily="18" charset="0"/>
+                <a:ea typeface="Arial Unicode MS" panose="020B0604020202020204" pitchFamily="34" charset="-128"/>
+                <a:cs typeface="Times New Roman" panose="02020603050405020304" pitchFamily="18" charset="0"/>
+              </a:rPr>
+              <a:t>Is there a standard procedure for selecting the fit ranges for (1–T) and C?</a:t>
+            </a:r>
+          </a:p>
+          <a:p>
+            <a:pPr>
+              <a:spcAft>
+                <a:spcPts val="600"/>
+              </a:spcAft>
+            </a:pPr>
+            <a:r>
+              <a:rPr lang="en-US" sz="1400" dirty="0">
+                <a:latin typeface="Times New Roman" panose="02020603050405020304" pitchFamily="18" charset="0"/>
+                <a:ea typeface="Arial Unicode MS" panose="020B0604020202020204" pitchFamily="34" charset="-128"/>
+                <a:cs typeface="Times New Roman" panose="02020603050405020304" pitchFamily="18" charset="0"/>
+              </a:rPr>
+              <a:t>Are the deviations in our values within expectations considering NNLO?</a:t>
+            </a:r>
+          </a:p>
+        </p:txBody>
+      </p:sp>
+      <p:pic>
+        <p:nvPicPr>
+          <p:cNvPr id="3" name="Picture 2" descr="A graph of a graph&#10;&#10;AI-generated content may be incorrect.">
+            <a:extLst>
+              <a:ext uri="{FF2B5EF4-FFF2-40B4-BE49-F238E27FC236}">
+                <a16:creationId xmlns:a16="http://schemas.microsoft.com/office/drawing/2014/main" id="{C89B8D22-4751-383B-359B-79E112E5BE6B}"/>
+              </a:ext>
+            </a:extLst>
+          </p:cNvPr>
+          <p:cNvPicPr>
+            <a:picLocks noChangeAspect="1"/>
+          </p:cNvPicPr>
+          <p:nvPr/>
+        </p:nvPicPr>
+        <p:blipFill>
+          <a:blip r:embed="rId2">
+            <a:extLst>
+              <a:ext uri="{28A0092B-C50C-407E-A947-70E740481C1C}">
+                <a14:useLocalDpi xmlns:a14="http://schemas.microsoft.com/office/drawing/2010/main" val="0"/>
+              </a:ext>
+            </a:extLst>
+          </a:blip>
+          <a:srcRect b="34119"/>
+          <a:stretch>
+            <a:fillRect/>
+          </a:stretch>
+        </p:blipFill>
+        <p:spPr>
+          <a:xfrm>
+            <a:off x="8186850" y="299104"/>
+            <a:ext cx="3824236" cy="6548106"/>
+          </a:xfrm>
+          <a:prstGeom prst="rect">
+            <a:avLst/>
+          </a:prstGeom>
+        </p:spPr>
+      </p:pic>
+    </p:spTree>
+    <p:extLst>
+      <p:ext uri="{BB962C8B-B14F-4D97-AF65-F5344CB8AC3E}">
+        <p14:creationId xmlns:p14="http://schemas.microsoft.com/office/powerpoint/2010/main" val="3322251253"/>
+      </p:ext>
+    </p:extLst>
+  </p:cSld>
+  <p:clrMapOvr>
+    <a:masterClrMapping/>
+  </p:clrMapOvr>
+</p:sld>
+</file>
+
+<file path=ppt/slides/slide12.xml><?xml version="1.0" encoding="utf-8"?>
+<p:sld xmlns:a="http://schemas.openxmlformats.org/drawingml/2006/main" xmlns:r="http://schemas.openxmlformats.org/officeDocument/2006/relationships" xmlns:p="http://schemas.openxmlformats.org/presentationml/2006/main">
+  <p:cSld>
+    <p:spTree>
+      <p:nvGrpSpPr>
+        <p:cNvPr id="1" name="">
+          <a:extLst>
+            <a:ext uri="{FF2B5EF4-FFF2-40B4-BE49-F238E27FC236}">
+              <a16:creationId xmlns:a16="http://schemas.microsoft.com/office/drawing/2014/main" id="{DD657FE3-CB1E-9BA4-1FB3-6EEDB6BAC0C5}"/>
+            </a:ext>
+          </a:extLst>
+        </p:cNvPr>
+        <p:cNvGrpSpPr/>
+        <p:nvPr/>
+      </p:nvGrpSpPr>
+      <p:grpSpPr>
+        <a:xfrm>
+          <a:off x="0" y="0"/>
+          <a:ext cx="0" cy="0"/>
+          <a:chOff x="0" y="0"/>
+          <a:chExt cx="0" cy="0"/>
+        </a:xfrm>
+      </p:grpSpPr>
+      <p:sp>
+        <p:nvSpPr>
+          <p:cNvPr id="2" name="Rectangle 1">
+            <a:extLst>
+              <a:ext uri="{FF2B5EF4-FFF2-40B4-BE49-F238E27FC236}">
+                <a16:creationId xmlns:a16="http://schemas.microsoft.com/office/drawing/2014/main" id="{B8DE7E88-E5D1-937D-9EF6-C98891D23734}"/>
+              </a:ext>
+            </a:extLst>
+          </p:cNvPr>
+          <p:cNvSpPr/>
+          <p:nvPr/>
+        </p:nvSpPr>
+        <p:spPr>
+          <a:xfrm>
+            <a:off x="0" y="0"/>
+            <a:ext cx="12192000" cy="6858000"/>
+          </a:xfrm>
+          <a:prstGeom prst="rect">
+            <a:avLst/>
+          </a:prstGeom>
+          <a:solidFill>
+            <a:srgbClr val="990000"/>
+          </a:solidFill>
+          <a:ln>
+            <a:noFill/>
+          </a:ln>
+        </p:spPr>
+        <p:style>
+          <a:lnRef idx="2">
+            <a:schemeClr val="accent1">
+              <a:shade val="15000"/>
+            </a:schemeClr>
+          </a:lnRef>
+          <a:fillRef idx="1">
+            <a:schemeClr val="accent1"/>
+          </a:fillRef>
+          <a:effectRef idx="0">
+            <a:schemeClr val="accent1"/>
+          </a:effectRef>
+          <a:fontRef idx="minor">
+            <a:schemeClr val="lt1"/>
+          </a:fontRef>
+        </p:style>
+        <p:txBody>
+          <a:bodyPr rtlCol="0" anchor="ctr"/>
+          <a:lstStyle/>
+          <a:p>
+            <a:pPr algn="ctr"/>
+            <a:endParaRPr lang="en-GB"/>
+          </a:p>
+        </p:txBody>
+      </p:sp>
+      <p:sp>
+        <p:nvSpPr>
+          <p:cNvPr id="3" name="Title 3">
+            <a:extLst>
+              <a:ext uri="{FF2B5EF4-FFF2-40B4-BE49-F238E27FC236}">
+                <a16:creationId xmlns:a16="http://schemas.microsoft.com/office/drawing/2014/main" id="{D0E3C629-F6E6-EDAB-FE9B-DCB93349AD01}"/>
+              </a:ext>
+            </a:extLst>
+          </p:cNvPr>
+          <p:cNvSpPr txBox="1">
+            <a:spLocks/>
+          </p:cNvSpPr>
+          <p:nvPr/>
+        </p:nvSpPr>
+        <p:spPr>
+          <a:xfrm>
+            <a:off x="200829" y="344910"/>
+            <a:ext cx="11790342" cy="3492098"/>
+          </a:xfrm>
+          <a:prstGeom prst="rect">
+            <a:avLst/>
+          </a:prstGeom>
+        </p:spPr>
+        <p:txBody>
+          <a:bodyPr vert="horz" lIns="91440" tIns="45720" rIns="91440" bIns="45720" rtlCol="0" anchor="b">
+            <a:normAutofit/>
+          </a:bodyPr>
+          <a:lstStyle>
+            <a:lvl1pPr algn="l" defTabSz="914400" rtl="0" eaLnBrk="1" latinLnBrk="0" hangingPunct="1">
+              <a:lnSpc>
+                <a:spcPct val="90000"/>
+              </a:lnSpc>
+              <a:spcBef>
+                <a:spcPct val="0"/>
+              </a:spcBef>
+              <a:buNone/>
+              <a:defRPr sz="6000" kern="1200">
+                <a:solidFill>
+                  <a:schemeClr val="tx1"/>
+                </a:solidFill>
+                <a:latin typeface="+mj-lt"/>
+                <a:ea typeface="+mj-ea"/>
+                <a:cs typeface="+mj-cs"/>
+              </a:defRPr>
+            </a:lvl1pPr>
+          </a:lstStyle>
+          <a:p>
+            <a:pPr algn="ctr">
+              <a:lnSpc>
+                <a:spcPct val="100000"/>
+              </a:lnSpc>
+            </a:pPr>
+            <a:r>
+              <a:rPr lang="en-US" sz="5400" b="1" dirty="0">
+                <a:solidFill>
+                  <a:schemeClr val="bg1"/>
+                </a:solidFill>
+                <a:latin typeface="Times New Roman" panose="02020603050405020304" pitchFamily="18" charset="0"/>
+                <a:ea typeface="Arial Unicode MS" panose="020B0604020202020204" pitchFamily="34" charset="-128"/>
+                <a:cs typeface="Times New Roman" panose="02020603050405020304" pitchFamily="18" charset="0"/>
+              </a:rPr>
+              <a:t>Backup</a:t>
+            </a:r>
+          </a:p>
+        </p:txBody>
+      </p:sp>
+    </p:spTree>
+    <p:extLst>
+      <p:ext uri="{BB962C8B-B14F-4D97-AF65-F5344CB8AC3E}">
+        <p14:creationId xmlns:p14="http://schemas.microsoft.com/office/powerpoint/2010/main" val="148931739"/>
+      </p:ext>
+    </p:extLst>
+  </p:cSld>
+  <p:clrMapOvr>
+    <a:masterClrMapping/>
+  </p:clrMapOvr>
+</p:sld>
+</file>
+
+<file path=ppt/slides/slide13.xml><?xml version="1.0" encoding="utf-8"?>
+<p:sld xmlns:a="http://schemas.openxmlformats.org/drawingml/2006/main" xmlns:r="http://schemas.openxmlformats.org/officeDocument/2006/relationships" xmlns:p="http://schemas.openxmlformats.org/presentationml/2006/main">
+  <p:cSld>
+    <p:spTree>
+      <p:nvGrpSpPr>
+        <p:cNvPr id="1" name="">
+          <a:extLst>
+            <a:ext uri="{FF2B5EF4-FFF2-40B4-BE49-F238E27FC236}">
+              <a16:creationId xmlns:a16="http://schemas.microsoft.com/office/drawing/2014/main" id="{E9BC41B6-AC70-48C3-6BF2-9980E19FF4C6}"/>
+            </a:ext>
+          </a:extLst>
+        </p:cNvPr>
+        <p:cNvGrpSpPr/>
+        <p:nvPr/>
+      </p:nvGrpSpPr>
+      <p:grpSpPr>
+        <a:xfrm>
+          <a:off x="0" y="0"/>
+          <a:ext cx="0" cy="0"/>
+          <a:chOff x="0" y="0"/>
+          <a:chExt cx="0" cy="0"/>
+        </a:xfrm>
+      </p:grpSpPr>
+      <p:sp>
+        <p:nvSpPr>
+          <p:cNvPr id="5" name="Title 4">
+            <a:extLst>
+              <a:ext uri="{FF2B5EF4-FFF2-40B4-BE49-F238E27FC236}">
+                <a16:creationId xmlns:a16="http://schemas.microsoft.com/office/drawing/2014/main" id="{51311BFD-DFD2-BEED-EEEF-742F2EC835C2}"/>
+              </a:ext>
+            </a:extLst>
+          </p:cNvPr>
+          <p:cNvSpPr>
+            <a:spLocks noGrp="1"/>
+          </p:cNvSpPr>
+          <p:nvPr>
+            <p:ph type="title"/>
+          </p:nvPr>
+        </p:nvSpPr>
+        <p:spPr>
+          <a:xfrm>
+            <a:off x="206476" y="188780"/>
+            <a:ext cx="11804610" cy="766916"/>
+          </a:xfrm>
+        </p:spPr>
+        <p:txBody>
+          <a:bodyPr>
+            <a:normAutofit/>
+          </a:bodyPr>
+          <a:lstStyle/>
+          <a:p>
+            <a:r>
+              <a:rPr lang="en-US" sz="2800" b="1" dirty="0">
+                <a:latin typeface="Times New Roman" panose="02020603050405020304" pitchFamily="18" charset="0"/>
+                <a:ea typeface="Arial Unicode MS" panose="020B0604020202020204" pitchFamily="34" charset="-128"/>
+                <a:cs typeface="Times New Roman" panose="02020603050405020304" pitchFamily="18" charset="0"/>
+              </a:rPr>
+              <a:t>Workflow – TF1 functions</a:t>
+            </a:r>
+            <a:endParaRPr lang="en-IN" sz="2800" b="1" dirty="0">
+              <a:latin typeface="Times New Roman" panose="02020603050405020304" pitchFamily="18" charset="0"/>
+              <a:ea typeface="Arial Unicode MS" panose="020B0604020202020204" pitchFamily="34" charset="-128"/>
+              <a:cs typeface="Times New Roman" panose="02020603050405020304" pitchFamily="18" charset="0"/>
+            </a:endParaRPr>
+          </a:p>
+        </p:txBody>
+      </p:sp>
+      <p:pic>
+        <p:nvPicPr>
+          <p:cNvPr id="10" name="Picture 9">
+            <a:extLst>
+              <a:ext uri="{FF2B5EF4-FFF2-40B4-BE49-F238E27FC236}">
+                <a16:creationId xmlns:a16="http://schemas.microsoft.com/office/drawing/2014/main" id="{472E899C-22CF-5D12-BE9F-A6BB295A09AF}"/>
+              </a:ext>
+            </a:extLst>
+          </p:cNvPr>
+          <p:cNvPicPr>
+            <a:picLocks noChangeAspect="1"/>
+          </p:cNvPicPr>
+          <p:nvPr/>
+        </p:nvPicPr>
+        <p:blipFill>
+          <a:blip r:embed="rId2"/>
+          <a:stretch>
+            <a:fillRect/>
+          </a:stretch>
+        </p:blipFill>
+        <p:spPr>
+          <a:xfrm>
+            <a:off x="206476" y="1155360"/>
+            <a:ext cx="11804610" cy="3385348"/>
+          </a:xfrm>
+          <a:prstGeom prst="rect">
+            <a:avLst/>
+          </a:prstGeom>
+        </p:spPr>
+      </p:pic>
+      <p:pic>
+        <p:nvPicPr>
+          <p:cNvPr id="14" name="Picture 13">
+            <a:extLst>
+              <a:ext uri="{FF2B5EF4-FFF2-40B4-BE49-F238E27FC236}">
+                <a16:creationId xmlns:a16="http://schemas.microsoft.com/office/drawing/2014/main" id="{EED83112-FA01-F4CA-EDF0-2E1D7CDB2574}"/>
+              </a:ext>
+            </a:extLst>
+          </p:cNvPr>
+          <p:cNvPicPr>
+            <a:picLocks noChangeAspect="1"/>
+          </p:cNvPicPr>
+          <p:nvPr/>
+        </p:nvPicPr>
+        <p:blipFill>
+          <a:blip r:embed="rId3"/>
+          <a:stretch>
+            <a:fillRect/>
+          </a:stretch>
+        </p:blipFill>
+        <p:spPr>
+          <a:xfrm>
+            <a:off x="3994988" y="4594185"/>
+            <a:ext cx="4227586" cy="2075035"/>
+          </a:xfrm>
+          <a:prstGeom prst="rect">
+            <a:avLst/>
+          </a:prstGeom>
+        </p:spPr>
+      </p:pic>
+    </p:spTree>
+    <p:extLst>
+      <p:ext uri="{BB962C8B-B14F-4D97-AF65-F5344CB8AC3E}">
+        <p14:creationId xmlns:p14="http://schemas.microsoft.com/office/powerpoint/2010/main" val="1224501784"/>
+      </p:ext>
+    </p:extLst>
+  </p:cSld>
+  <p:clrMapOvr>
+    <a:masterClrMapping/>
+  </p:clrMapOvr>
+</p:sld>
+</file>
+
+<file path=ppt/slides/slide14.xml><?xml version="1.0" encoding="utf-8"?>
+<p:sld xmlns:a="http://schemas.openxmlformats.org/drawingml/2006/main" xmlns:r="http://schemas.openxmlformats.org/officeDocument/2006/relationships" xmlns:p="http://schemas.openxmlformats.org/presentationml/2006/main">
+  <p:cSld>
+    <p:spTree>
+      <p:nvGrpSpPr>
+        <p:cNvPr id="1" name="">
+          <a:extLst>
+            <a:ext uri="{FF2B5EF4-FFF2-40B4-BE49-F238E27FC236}">
+              <a16:creationId xmlns:a16="http://schemas.microsoft.com/office/drawing/2014/main" id="{04742AEC-8303-7147-5D3E-2BAEF104A2C6}"/>
+            </a:ext>
+          </a:extLst>
+        </p:cNvPr>
+        <p:cNvGrpSpPr/>
+        <p:nvPr/>
+      </p:nvGrpSpPr>
+      <p:grpSpPr>
+        <a:xfrm>
+          <a:off x="0" y="0"/>
+          <a:ext cx="0" cy="0"/>
+          <a:chOff x="0" y="0"/>
+          <a:chExt cx="0" cy="0"/>
+        </a:xfrm>
+      </p:grpSpPr>
+      <p:sp>
+        <p:nvSpPr>
+          <p:cNvPr id="5" name="Title 4">
+            <a:extLst>
+              <a:ext uri="{FF2B5EF4-FFF2-40B4-BE49-F238E27FC236}">
+                <a16:creationId xmlns:a16="http://schemas.microsoft.com/office/drawing/2014/main" id="{81EE84ED-D04E-DBDA-E466-2616067042CA}"/>
+              </a:ext>
+            </a:extLst>
+          </p:cNvPr>
+          <p:cNvSpPr>
+            <a:spLocks noGrp="1"/>
+          </p:cNvSpPr>
+          <p:nvPr>
+            <p:ph type="title"/>
+          </p:nvPr>
+        </p:nvSpPr>
+        <p:spPr>
+          <a:xfrm>
+            <a:off x="206476" y="188780"/>
+            <a:ext cx="11804610" cy="766916"/>
+          </a:xfrm>
+        </p:spPr>
+        <p:txBody>
+          <a:bodyPr>
+            <a:normAutofit/>
+          </a:bodyPr>
+          <a:lstStyle/>
+          <a:p>
+            <a:r>
+              <a:rPr lang="en-US" sz="2800" b="1" dirty="0">
+                <a:latin typeface="Times New Roman" panose="02020603050405020304" pitchFamily="18" charset="0"/>
+                <a:ea typeface="Arial Unicode MS" panose="020B0604020202020204" pitchFamily="34" charset="-128"/>
+                <a:cs typeface="Times New Roman" panose="02020603050405020304" pitchFamily="18" charset="0"/>
+              </a:rPr>
+              <a:t>Paper overview</a:t>
+            </a:r>
+            <a:endParaRPr lang="en-IN" sz="2800" b="1" dirty="0">
+              <a:latin typeface="Times New Roman" panose="02020603050405020304" pitchFamily="18" charset="0"/>
+              <a:ea typeface="Arial Unicode MS" panose="020B0604020202020204" pitchFamily="34" charset="-128"/>
+              <a:cs typeface="Times New Roman" panose="02020603050405020304" pitchFamily="18" charset="0"/>
+            </a:endParaRPr>
+          </a:p>
+        </p:txBody>
+      </p:sp>
+      <p:sp>
+        <p:nvSpPr>
+          <p:cNvPr id="6" name="Content Placeholder 5">
+            <a:extLst>
+              <a:ext uri="{FF2B5EF4-FFF2-40B4-BE49-F238E27FC236}">
+                <a16:creationId xmlns:a16="http://schemas.microsoft.com/office/drawing/2014/main" id="{D77BC2C7-145E-4EEB-4843-DE7B6D7C755B}"/>
+              </a:ext>
+            </a:extLst>
+          </p:cNvPr>
+          <p:cNvSpPr>
+            <a:spLocks noGrp="1"/>
+          </p:cNvSpPr>
+          <p:nvPr>
+            <p:ph idx="1"/>
+          </p:nvPr>
+        </p:nvSpPr>
+        <p:spPr>
+          <a:xfrm>
+            <a:off x="206476" y="1064608"/>
+            <a:ext cx="5889524" cy="5571142"/>
+          </a:xfrm>
+        </p:spPr>
+        <p:txBody>
+          <a:bodyPr>
+            <a:noAutofit/>
+          </a:bodyPr>
+          <a:lstStyle/>
+          <a:p>
+            <a:pPr>
+              <a:spcAft>
+                <a:spcPts val="600"/>
+              </a:spcAft>
+            </a:pPr>
+            <a:r>
+              <a:rPr lang="en-US" sz="1400" dirty="0">
+                <a:latin typeface="Times New Roman" panose="02020603050405020304" pitchFamily="18" charset="0"/>
+                <a:ea typeface="Arial Unicode MS" panose="020B0604020202020204" pitchFamily="34" charset="-128"/>
+                <a:cs typeface="Times New Roman" panose="02020603050405020304" pitchFamily="18" charset="0"/>
+              </a:rPr>
+              <a:t>QCD in </a:t>
+            </a:r>
+            <a:r>
+              <a:rPr lang="en-US" sz="1400" i="1" dirty="0">
+                <a:latin typeface="Times New Roman" panose="02020603050405020304" pitchFamily="18" charset="0"/>
+                <a:ea typeface="Arial Unicode MS" panose="020B0604020202020204" pitchFamily="34" charset="-128"/>
+                <a:cs typeface="Times New Roman" panose="02020603050405020304" pitchFamily="18" charset="0"/>
+              </a:rPr>
+              <a:t>e</a:t>
+            </a:r>
+            <a:r>
+              <a:rPr lang="en-US" sz="1400" i="1" baseline="30000" dirty="0">
+                <a:latin typeface="Times New Roman" panose="02020603050405020304" pitchFamily="18" charset="0"/>
+                <a:ea typeface="Arial Unicode MS" panose="020B0604020202020204" pitchFamily="34" charset="-128"/>
+                <a:cs typeface="Times New Roman" panose="02020603050405020304" pitchFamily="18" charset="0"/>
+              </a:rPr>
+              <a:t>+</a:t>
+            </a:r>
+            <a:r>
+              <a:rPr lang="en-US" sz="1400" i="1" dirty="0">
+                <a:latin typeface="Times New Roman" panose="02020603050405020304" pitchFamily="18" charset="0"/>
+                <a:ea typeface="Arial Unicode MS" panose="020B0604020202020204" pitchFamily="34" charset="-128"/>
+                <a:cs typeface="Times New Roman" panose="02020603050405020304" pitchFamily="18" charset="0"/>
+              </a:rPr>
+              <a:t>e</a:t>
+            </a:r>
+            <a:r>
+              <a:rPr lang="en-US" sz="1400" i="1" baseline="30000" dirty="0">
+                <a:latin typeface="Times New Roman" panose="02020603050405020304" pitchFamily="18" charset="0"/>
+                <a:ea typeface="Arial Unicode MS" panose="020B0604020202020204" pitchFamily="34" charset="-128"/>
+                <a:cs typeface="Times New Roman" panose="02020603050405020304" pitchFamily="18" charset="0"/>
+              </a:rPr>
+              <a:t>–</a:t>
+            </a:r>
+            <a:r>
+              <a:rPr lang="en-US" sz="1400" dirty="0">
+                <a:latin typeface="Times New Roman" panose="02020603050405020304" pitchFamily="18" charset="0"/>
+                <a:ea typeface="Arial Unicode MS" panose="020B0604020202020204" pitchFamily="34" charset="-128"/>
+                <a:cs typeface="Times New Roman" panose="02020603050405020304" pitchFamily="18" charset="0"/>
+              </a:rPr>
+              <a:t> annihilations</a:t>
+            </a:r>
+          </a:p>
+          <a:p>
+            <a:pPr lvl="1">
+              <a:spcAft>
+                <a:spcPts val="600"/>
+              </a:spcAft>
+            </a:pPr>
+            <a:r>
+              <a:rPr lang="en-GB" sz="1400" dirty="0">
+                <a:latin typeface="Times New Roman" panose="02020603050405020304" pitchFamily="18" charset="0"/>
+                <a:cs typeface="Times New Roman" panose="02020603050405020304" pitchFamily="18" charset="0"/>
+              </a:rPr>
+              <a:t>General features</a:t>
+            </a:r>
+          </a:p>
+          <a:p>
+            <a:pPr lvl="1">
+              <a:spcAft>
+                <a:spcPts val="600"/>
+              </a:spcAft>
+            </a:pPr>
+            <a:r>
+              <a:rPr lang="en-GB" sz="1400" dirty="0">
+                <a:latin typeface="Times New Roman" panose="02020603050405020304" pitchFamily="18" charset="0"/>
+                <a:cs typeface="Times New Roman" panose="02020603050405020304" pitchFamily="18" charset="0"/>
+              </a:rPr>
+              <a:t>Event shape observables</a:t>
+            </a:r>
+          </a:p>
+          <a:p>
+            <a:pPr>
+              <a:spcAft>
+                <a:spcPts val="600"/>
+              </a:spcAft>
+            </a:pPr>
+            <a:r>
+              <a:rPr lang="en-US" sz="1400" dirty="0">
+                <a:latin typeface="Times New Roman" panose="02020603050405020304" pitchFamily="18" charset="0"/>
+                <a:ea typeface="Arial Unicode MS" panose="020B0604020202020204" pitchFamily="34" charset="-128"/>
+                <a:cs typeface="Times New Roman" panose="02020603050405020304" pitchFamily="18" charset="0"/>
+              </a:rPr>
+              <a:t>Event generation</a:t>
+            </a:r>
+          </a:p>
+          <a:p>
+            <a:pPr lvl="1">
+              <a:spcAft>
+                <a:spcPts val="600"/>
+              </a:spcAft>
+            </a:pPr>
+            <a:r>
+              <a:rPr lang="en-US" sz="1400" dirty="0">
+                <a:latin typeface="Times New Roman" panose="02020603050405020304" pitchFamily="18" charset="0"/>
+                <a:ea typeface="Arial Unicode MS" panose="020B0604020202020204" pitchFamily="34" charset="-128"/>
+                <a:cs typeface="Times New Roman" panose="02020603050405020304" pitchFamily="18" charset="0"/>
+              </a:rPr>
+              <a:t>Process selections</a:t>
+            </a:r>
+          </a:p>
+          <a:p>
+            <a:pPr lvl="1">
+              <a:spcAft>
+                <a:spcPts val="600"/>
+              </a:spcAft>
+            </a:pPr>
+            <a:r>
+              <a:rPr lang="en-US" sz="1400" dirty="0">
+                <a:latin typeface="Times New Roman" panose="02020603050405020304" pitchFamily="18" charset="0"/>
+                <a:ea typeface="Arial Unicode MS" panose="020B0604020202020204" pitchFamily="34" charset="-128"/>
+                <a:cs typeface="Times New Roman" panose="02020603050405020304" pitchFamily="18" charset="0"/>
+              </a:rPr>
+              <a:t>PYTHIA calibration</a:t>
+            </a:r>
+          </a:p>
+          <a:p>
+            <a:pPr>
+              <a:spcAft>
+                <a:spcPts val="600"/>
+              </a:spcAft>
+            </a:pPr>
+            <a:r>
+              <a:rPr lang="en-US" sz="1400" dirty="0">
+                <a:latin typeface="Times New Roman" panose="02020603050405020304" pitchFamily="18" charset="0"/>
+                <a:ea typeface="Arial Unicode MS" panose="020B0604020202020204" pitchFamily="34" charset="-128"/>
+                <a:cs typeface="Times New Roman" panose="02020603050405020304" pitchFamily="18" charset="0"/>
+              </a:rPr>
+              <a:t>Experimental distortions</a:t>
+            </a:r>
+          </a:p>
+          <a:p>
+            <a:pPr lvl="1">
+              <a:spcAft>
+                <a:spcPts val="600"/>
+              </a:spcAft>
+            </a:pPr>
+            <a:r>
+              <a:rPr lang="en-US" sz="1400" dirty="0">
+                <a:latin typeface="Times New Roman" panose="02020603050405020304" pitchFamily="18" charset="0"/>
+                <a:ea typeface="Arial Unicode MS" panose="020B0604020202020204" pitchFamily="34" charset="-128"/>
+                <a:cs typeface="Times New Roman" panose="02020603050405020304" pitchFamily="18" charset="0"/>
+              </a:rPr>
+              <a:t>QED radiation</a:t>
+            </a:r>
+          </a:p>
+          <a:p>
+            <a:pPr lvl="1">
+              <a:spcAft>
+                <a:spcPts val="600"/>
+              </a:spcAft>
+            </a:pPr>
+            <a:r>
+              <a:rPr lang="en-US" sz="1400" dirty="0">
+                <a:latin typeface="Times New Roman" panose="02020603050405020304" pitchFamily="18" charset="0"/>
+                <a:ea typeface="Arial Unicode MS" panose="020B0604020202020204" pitchFamily="34" charset="-128"/>
+                <a:cs typeface="Times New Roman" panose="02020603050405020304" pitchFamily="18" charset="0"/>
+              </a:rPr>
+              <a:t>Electroweak backgrounds</a:t>
+            </a:r>
+          </a:p>
+          <a:p>
+            <a:pPr>
+              <a:spcAft>
+                <a:spcPts val="600"/>
+              </a:spcAft>
+            </a:pPr>
+            <a:r>
+              <a:rPr lang="en-US" sz="1400" b="1" dirty="0">
+                <a:solidFill>
+                  <a:srgbClr val="C00000"/>
+                </a:solidFill>
+                <a:latin typeface="Times New Roman" panose="02020603050405020304" pitchFamily="18" charset="0"/>
+                <a:ea typeface="Arial Unicode MS" panose="020B0604020202020204" pitchFamily="34" charset="-128"/>
+                <a:cs typeface="Times New Roman" panose="02020603050405020304" pitchFamily="18" charset="0"/>
+              </a:rPr>
+              <a:t>Determination of </a:t>
+            </a:r>
+            <a:r>
+              <a:rPr lang="el-GR" sz="1400" b="1" dirty="0">
+                <a:solidFill>
+                  <a:srgbClr val="C00000"/>
+                </a:solidFill>
+                <a:latin typeface="Times New Roman" panose="02020603050405020304" pitchFamily="18" charset="0"/>
+                <a:ea typeface="Arial Unicode MS" panose="020B0604020202020204" pitchFamily="34" charset="-128"/>
+                <a:cs typeface="Times New Roman" panose="02020603050405020304" pitchFamily="18" charset="0"/>
+              </a:rPr>
+              <a:t>α</a:t>
+            </a:r>
+            <a:r>
+              <a:rPr lang="en-US" sz="1400" b="1" baseline="-25000" dirty="0">
+                <a:solidFill>
+                  <a:srgbClr val="C00000"/>
+                </a:solidFill>
+                <a:latin typeface="Times New Roman" panose="02020603050405020304" pitchFamily="18" charset="0"/>
+                <a:ea typeface="Arial Unicode MS" panose="020B0604020202020204" pitchFamily="34" charset="-128"/>
+                <a:cs typeface="Times New Roman" panose="02020603050405020304" pitchFamily="18" charset="0"/>
+              </a:rPr>
+              <a:t>s</a:t>
+            </a:r>
+          </a:p>
+          <a:p>
+            <a:pPr lvl="1">
+              <a:spcAft>
+                <a:spcPts val="600"/>
+              </a:spcAft>
+            </a:pPr>
+            <a:r>
+              <a:rPr lang="en-US" sz="1400" b="1" dirty="0">
+                <a:solidFill>
+                  <a:srgbClr val="C00000"/>
+                </a:solidFill>
+                <a:latin typeface="Times New Roman" panose="02020603050405020304" pitchFamily="18" charset="0"/>
+                <a:ea typeface="Arial Unicode MS" panose="020B0604020202020204" pitchFamily="34" charset="-128"/>
+                <a:cs typeface="Times New Roman" panose="02020603050405020304" pitchFamily="18" charset="0"/>
+              </a:rPr>
+              <a:t>Theoretical description</a:t>
+            </a:r>
+          </a:p>
+          <a:p>
+            <a:pPr lvl="1">
+              <a:spcAft>
+                <a:spcPts val="600"/>
+              </a:spcAft>
+            </a:pPr>
+            <a:r>
+              <a:rPr lang="en-US" sz="1400" b="1" dirty="0">
+                <a:solidFill>
+                  <a:srgbClr val="C00000"/>
+                </a:solidFill>
+                <a:latin typeface="Times New Roman" panose="02020603050405020304" pitchFamily="18" charset="0"/>
+                <a:ea typeface="Arial Unicode MS" panose="020B0604020202020204" pitchFamily="34" charset="-128"/>
+                <a:cs typeface="Times New Roman" panose="02020603050405020304" pitchFamily="18" charset="0"/>
+              </a:rPr>
+              <a:t>Fitting procedure</a:t>
+            </a:r>
+          </a:p>
+          <a:p>
+            <a:pPr lvl="1">
+              <a:spcAft>
+                <a:spcPts val="600"/>
+              </a:spcAft>
+            </a:pPr>
+            <a:r>
+              <a:rPr lang="en-US" sz="1400" b="1" dirty="0">
+                <a:solidFill>
+                  <a:srgbClr val="C00000"/>
+                </a:solidFill>
+                <a:latin typeface="Times New Roman" panose="02020603050405020304" pitchFamily="18" charset="0"/>
+                <a:ea typeface="Arial Unicode MS" panose="020B0604020202020204" pitchFamily="34" charset="-128"/>
+                <a:cs typeface="Times New Roman" panose="02020603050405020304" pitchFamily="18" charset="0"/>
+              </a:rPr>
+              <a:t>Energy evolution</a:t>
+            </a:r>
+          </a:p>
+          <a:p>
+            <a:pPr>
+              <a:spcAft>
+                <a:spcPts val="600"/>
+              </a:spcAft>
+            </a:pPr>
+            <a:r>
+              <a:rPr lang="en-US" sz="1400" dirty="0">
+                <a:latin typeface="Times New Roman" panose="02020603050405020304" pitchFamily="18" charset="0"/>
+                <a:ea typeface="Arial Unicode MS" panose="020B0604020202020204" pitchFamily="34" charset="-128"/>
+                <a:cs typeface="Times New Roman" panose="02020603050405020304" pitchFamily="18" charset="0"/>
+              </a:rPr>
+              <a:t>Inclusive Hadron Spectra</a:t>
+            </a:r>
+          </a:p>
+          <a:p>
+            <a:pPr lvl="1">
+              <a:spcAft>
+                <a:spcPts val="600"/>
+              </a:spcAft>
+            </a:pPr>
+            <a:r>
+              <a:rPr lang="en-US" sz="1400" dirty="0">
+                <a:latin typeface="Times New Roman" panose="02020603050405020304" pitchFamily="18" charset="0"/>
+                <a:ea typeface="Arial Unicode MS" panose="020B0604020202020204" pitchFamily="34" charset="-128"/>
+                <a:cs typeface="Times New Roman" panose="02020603050405020304" pitchFamily="18" charset="0"/>
+              </a:rPr>
+              <a:t>Charged hadron multiplicity</a:t>
+            </a:r>
+          </a:p>
+          <a:p>
+            <a:pPr lvl="1">
+              <a:spcAft>
+                <a:spcPts val="600"/>
+              </a:spcAft>
+            </a:pPr>
+            <a:r>
+              <a:rPr lang="en-US" sz="1400" dirty="0">
+                <a:latin typeface="Times New Roman" panose="02020603050405020304" pitchFamily="18" charset="0"/>
+                <a:ea typeface="Arial Unicode MS" panose="020B0604020202020204" pitchFamily="34" charset="-128"/>
+                <a:cs typeface="Times New Roman" panose="02020603050405020304" pitchFamily="18" charset="0"/>
+              </a:rPr>
+              <a:t>Momentum distributions and peaks</a:t>
+            </a:r>
+          </a:p>
+        </p:txBody>
+      </p:sp>
+      <p:pic>
+        <p:nvPicPr>
+          <p:cNvPr id="3" name="Picture 2">
+            <a:extLst>
+              <a:ext uri="{FF2B5EF4-FFF2-40B4-BE49-F238E27FC236}">
+                <a16:creationId xmlns:a16="http://schemas.microsoft.com/office/drawing/2014/main" id="{4A837DA2-9607-E26E-10F8-A0BD454D828D}"/>
+              </a:ext>
+            </a:extLst>
+          </p:cNvPr>
+          <p:cNvPicPr>
+            <a:picLocks noChangeAspect="1"/>
+          </p:cNvPicPr>
+          <p:nvPr/>
+        </p:nvPicPr>
+        <p:blipFill>
+          <a:blip r:embed="rId2"/>
+          <a:stretch>
+            <a:fillRect/>
+          </a:stretch>
+        </p:blipFill>
+        <p:spPr>
+          <a:xfrm>
+            <a:off x="5886013" y="1562318"/>
+            <a:ext cx="5187307" cy="3530541"/>
+          </a:xfrm>
+          <a:prstGeom prst="rect">
+            <a:avLst/>
+          </a:prstGeom>
+        </p:spPr>
+      </p:pic>
+    </p:spTree>
+    <p:extLst>
+      <p:ext uri="{BB962C8B-B14F-4D97-AF65-F5344CB8AC3E}">
+        <p14:creationId xmlns:p14="http://schemas.microsoft.com/office/powerpoint/2010/main" val="848443079"/>
       </p:ext>
     </p:extLst>
   </p:cSld>
@@ -3605,7 +4833,7 @@
                 <a:ea typeface="Arial Unicode MS" panose="020B0604020202020204" pitchFamily="34" charset="-128"/>
                 <a:cs typeface="Times New Roman" panose="02020603050405020304" pitchFamily="18" charset="0"/>
               </a:rPr>
-              <a:t>Paper overview</a:t>
+              <a:t>Overview</a:t>
             </a:r>
             <a:endParaRPr lang="en-IN" sz="2800" b="1" dirty="0">
               <a:latin typeface="Times New Roman" panose="02020603050405020304" pitchFamily="18" charset="0"/>
@@ -3633,8 +4861,8 @@
         </p:nvSpPr>
         <p:spPr>
           <a:xfrm>
-            <a:off x="206476" y="1064608"/>
-            <a:ext cx="5889524" cy="5571142"/>
+            <a:off x="206475" y="1064608"/>
+            <a:ext cx="7033490" cy="5571142"/>
           </a:xfrm>
         </p:spPr>
         <p:txBody>
@@ -3649,80 +4877,36 @@
               </a:spcAft>
             </a:pPr>
             <a:r>
-              <a:rPr lang="en-US" sz="1400" dirty="0">
+              <a:rPr lang="en-US" sz="1800" dirty="0">
                 <a:latin typeface="Times New Roman" panose="02020603050405020304" pitchFamily="18" charset="0"/>
                 <a:ea typeface="Arial Unicode MS" panose="020B0604020202020204" pitchFamily="34" charset="-128"/>
                 <a:cs typeface="Times New Roman" panose="02020603050405020304" pitchFamily="18" charset="0"/>
               </a:rPr>
-              <a:t>QCD in </a:t>
-            </a:r>
-            <a:r>
-              <a:rPr lang="en-US" sz="1400" i="1" dirty="0">
+              <a:t>Objective is to extract </a:t>
+            </a:r>
+            <a:r>
+              <a:rPr lang="el-GR" sz="1800" dirty="0">
                 <a:latin typeface="Times New Roman" panose="02020603050405020304" pitchFamily="18" charset="0"/>
                 <a:ea typeface="Arial Unicode MS" panose="020B0604020202020204" pitchFamily="34" charset="-128"/>
                 <a:cs typeface="Times New Roman" panose="02020603050405020304" pitchFamily="18" charset="0"/>
               </a:rPr>
-              <a:t>e</a:t>
-            </a:r>
-            <a:r>
-              <a:rPr lang="en-US" sz="1400" i="1" baseline="30000" dirty="0">
+              <a:t>α</a:t>
+            </a:r>
+            <a:r>
+              <a:rPr lang="en-US" sz="1800" baseline="-25000" dirty="0">
                 <a:latin typeface="Times New Roman" panose="02020603050405020304" pitchFamily="18" charset="0"/>
                 <a:ea typeface="Arial Unicode MS" panose="020B0604020202020204" pitchFamily="34" charset="-128"/>
                 <a:cs typeface="Times New Roman" panose="02020603050405020304" pitchFamily="18" charset="0"/>
               </a:rPr>
-              <a:t>+</a:t>
-            </a:r>
-            <a:r>
-              <a:rPr lang="en-US" sz="1400" i="1" dirty="0">
+              <a:t>s</a:t>
+            </a:r>
+            <a:r>
+              <a:rPr lang="en-US" sz="1800" dirty="0">
                 <a:latin typeface="Times New Roman" panose="02020603050405020304" pitchFamily="18" charset="0"/>
                 <a:ea typeface="Arial Unicode MS" panose="020B0604020202020204" pitchFamily="34" charset="-128"/>
                 <a:cs typeface="Times New Roman" panose="02020603050405020304" pitchFamily="18" charset="0"/>
               </a:rPr>
-              <a:t>e</a:t>
-            </a:r>
-            <a:r>
-              <a:rPr lang="en-US" sz="1400" i="1" baseline="30000" dirty="0">
-                <a:latin typeface="Times New Roman" panose="02020603050405020304" pitchFamily="18" charset="0"/>
-                <a:ea typeface="Arial Unicode MS" panose="020B0604020202020204" pitchFamily="34" charset="-128"/>
-                <a:cs typeface="Times New Roman" panose="02020603050405020304" pitchFamily="18" charset="0"/>
-              </a:rPr>
-              <a:t>–</a:t>
-            </a:r>
-            <a:r>
-              <a:rPr lang="en-US" sz="1400" dirty="0">
-                <a:latin typeface="Times New Roman" panose="02020603050405020304" pitchFamily="18" charset="0"/>
-                <a:ea typeface="Arial Unicode MS" panose="020B0604020202020204" pitchFamily="34" charset="-128"/>
-                <a:cs typeface="Times New Roman" panose="02020603050405020304" pitchFamily="18" charset="0"/>
-              </a:rPr>
-              <a:t> annihilations</a:t>
-            </a:r>
-          </a:p>
-          <a:p>
-            <a:pPr lvl="1">
-              <a:spcAft>
-                <a:spcPts val="600"/>
-              </a:spcAft>
-            </a:pPr>
-            <a:r>
-              <a:rPr lang="en-GB" sz="1400" dirty="0">
-                <a:latin typeface="Times New Roman" panose="02020603050405020304" pitchFamily="18" charset="0"/>
-                <a:cs typeface="Times New Roman" panose="02020603050405020304" pitchFamily="18" charset="0"/>
-              </a:rPr>
-              <a:t>General features</a:t>
-            </a:r>
-          </a:p>
-          <a:p>
-            <a:pPr lvl="1">
-              <a:spcAft>
-                <a:spcPts val="600"/>
-              </a:spcAft>
-            </a:pPr>
-            <a:r>
-              <a:rPr lang="en-GB" sz="1400" dirty="0">
-                <a:latin typeface="Times New Roman" panose="02020603050405020304" pitchFamily="18" charset="0"/>
-                <a:cs typeface="Times New Roman" panose="02020603050405020304" pitchFamily="18" charset="0"/>
-              </a:rPr>
-              <a:t>Event shape observables</a:t>
+              <a:t> at FCC-ee energies: 91.2, 160, 240, 365 GeV</a:t>
             </a:r>
           </a:p>
           <a:p>
@@ -3732,42 +4916,12 @@
               </a:spcAft>
             </a:pPr>
             <a:r>
-              <a:rPr lang="en-US" sz="1400" dirty="0">
+              <a:rPr lang="en-US" sz="1800" dirty="0">
                 <a:latin typeface="Times New Roman" panose="02020603050405020304" pitchFamily="18" charset="0"/>
                 <a:ea typeface="Arial Unicode MS" panose="020B0604020202020204" pitchFamily="34" charset="-128"/>
                 <a:cs typeface="Times New Roman" panose="02020603050405020304" pitchFamily="18" charset="0"/>
               </a:rPr>
-              <a:t>Event generation</a:t>
-            </a:r>
-          </a:p>
-          <a:p>
-            <a:pPr lvl="1">
-              <a:spcAft>
-                <a:spcPts val="600"/>
-              </a:spcAft>
-            </a:pPr>
-            <a:r>
-              <a:rPr lang="en-US" sz="1400" dirty="0">
-                <a:latin typeface="Times New Roman" panose="02020603050405020304" pitchFamily="18" charset="0"/>
-                <a:ea typeface="Arial Unicode MS" panose="020B0604020202020204" pitchFamily="34" charset="-128"/>
-                <a:cs typeface="Times New Roman" panose="02020603050405020304" pitchFamily="18" charset="0"/>
-              </a:rPr>
-              <a:t>Process selections</a:t>
-            </a:r>
-          </a:p>
-          <a:p>
-            <a:pPr lvl="1">
-              <a:spcAft>
-                <a:spcPts val="600"/>
-              </a:spcAft>
-            </a:pPr>
-            <a:r>
-              <a:rPr lang="en-US" sz="1400" dirty="0">
-                <a:latin typeface="Times New Roman" panose="02020603050405020304" pitchFamily="18" charset="0"/>
-                <a:ea typeface="Arial Unicode MS" panose="020B0604020202020204" pitchFamily="34" charset="-128"/>
-                <a:cs typeface="Times New Roman" panose="02020603050405020304" pitchFamily="18" charset="0"/>
-              </a:rPr>
-              <a:t>PYTHIA calibration</a:t>
+              <a:t>For validation with LEP data: Simulated 5 million samples at each energy without ISR with hadronisation</a:t>
             </a:r>
           </a:p>
           <a:p>
@@ -3777,42 +4931,36 @@
               </a:spcAft>
             </a:pPr>
             <a:r>
-              <a:rPr lang="en-US" sz="1400" dirty="0">
+              <a:rPr lang="en-US" sz="1800" dirty="0">
                 <a:latin typeface="Times New Roman" panose="02020603050405020304" pitchFamily="18" charset="0"/>
                 <a:ea typeface="Arial Unicode MS" panose="020B0604020202020204" pitchFamily="34" charset="-128"/>
                 <a:cs typeface="Times New Roman" panose="02020603050405020304" pitchFamily="18" charset="0"/>
               </a:rPr>
-              <a:t>Experimental distortions</a:t>
-            </a:r>
-          </a:p>
-          <a:p>
-            <a:pPr lvl="1">
-              <a:spcAft>
-                <a:spcPts val="600"/>
-              </a:spcAft>
-            </a:pPr>
-            <a:r>
-              <a:rPr lang="en-US" sz="1400" dirty="0">
+              <a:t>For </a:t>
+            </a:r>
+            <a:r>
+              <a:rPr lang="el-GR" sz="1800" dirty="0">
                 <a:latin typeface="Times New Roman" panose="02020603050405020304" pitchFamily="18" charset="0"/>
                 <a:ea typeface="Arial Unicode MS" panose="020B0604020202020204" pitchFamily="34" charset="-128"/>
                 <a:cs typeface="Times New Roman" panose="02020603050405020304" pitchFamily="18" charset="0"/>
               </a:rPr>
-              <a:t>QED radiation</a:t>
-            </a:r>
-          </a:p>
-          <a:p>
-            <a:pPr lvl="1">
-              <a:spcAft>
-                <a:spcPts val="600"/>
-              </a:spcAft>
-            </a:pPr>
-            <a:r>
-              <a:rPr lang="en-US" sz="1400" dirty="0">
+              <a:t>α</a:t>
+            </a:r>
+            <a:r>
+              <a:rPr lang="en-US" sz="1800" baseline="-25000" dirty="0">
                 <a:latin typeface="Times New Roman" panose="02020603050405020304" pitchFamily="18" charset="0"/>
                 <a:ea typeface="Arial Unicode MS" panose="020B0604020202020204" pitchFamily="34" charset="-128"/>
                 <a:cs typeface="Times New Roman" panose="02020603050405020304" pitchFamily="18" charset="0"/>
               </a:rPr>
-              <a:t>Electroweak backgrounds</a:t>
+              <a:t>s</a:t>
+            </a:r>
+            <a:r>
+              <a:rPr lang="en-US" sz="1800" dirty="0">
+                <a:latin typeface="Times New Roman" panose="02020603050405020304" pitchFamily="18" charset="0"/>
+                <a:ea typeface="Arial Unicode MS" panose="020B0604020202020204" pitchFamily="34" charset="-128"/>
+                <a:cs typeface="Times New Roman" panose="02020603050405020304" pitchFamily="18" charset="0"/>
+              </a:rPr>
+              <a:t> extraction: Simulated 1 million samples at each energy without ISR without hadronisation</a:t>
             </a:r>
           </a:p>
           <a:p>
@@ -3822,91 +4970,28 @@
               </a:spcAft>
             </a:pPr>
             <a:r>
-              <a:rPr lang="en-US" sz="1400" b="1" dirty="0">
-                <a:solidFill>
-                  <a:srgbClr val="C00000"/>
-                </a:solidFill>
+              <a:rPr lang="en-US" sz="1800" dirty="0">
                 <a:latin typeface="Times New Roman" panose="02020603050405020304" pitchFamily="18" charset="0"/>
                 <a:ea typeface="Arial Unicode MS" panose="020B0604020202020204" pitchFamily="34" charset="-128"/>
                 <a:cs typeface="Times New Roman" panose="02020603050405020304" pitchFamily="18" charset="0"/>
               </a:rPr>
-              <a:t>Determination of </a:t>
-            </a:r>
-            <a:r>
-              <a:rPr lang="el-GR" sz="1400" b="1" dirty="0">
-                <a:solidFill>
-                  <a:srgbClr val="C00000"/>
-                </a:solidFill>
+              <a:t>Only ee →</a:t>
+            </a:r>
+            <a:r>
+              <a:rPr lang="el-GR" sz="1800" dirty="0">
                 <a:latin typeface="Times New Roman" panose="02020603050405020304" pitchFamily="18" charset="0"/>
                 <a:ea typeface="Arial Unicode MS" panose="020B0604020202020204" pitchFamily="34" charset="-128"/>
                 <a:cs typeface="Times New Roman" panose="02020603050405020304" pitchFamily="18" charset="0"/>
               </a:rPr>
-              <a:t>α</a:t>
-            </a:r>
-            <a:r>
-              <a:rPr lang="en-US" sz="1400" b="1" baseline="-25000" dirty="0">
-                <a:solidFill>
-                  <a:srgbClr val="C00000"/>
-                </a:solidFill>
+              <a:t> γ</a:t>
+            </a:r>
+            <a:r>
+              <a:rPr lang="en-US" sz="1800" dirty="0">
                 <a:latin typeface="Times New Roman" panose="02020603050405020304" pitchFamily="18" charset="0"/>
                 <a:ea typeface="Arial Unicode MS" panose="020B0604020202020204" pitchFamily="34" charset="-128"/>
                 <a:cs typeface="Times New Roman" panose="02020603050405020304" pitchFamily="18" charset="0"/>
               </a:rPr>
-              <a:t>s</a:t>
-            </a:r>
-          </a:p>
-          <a:p>
-            <a:pPr lvl="1">
-              <a:spcAft>
-                <a:spcPts val="600"/>
-              </a:spcAft>
-            </a:pPr>
-            <a:r>
-              <a:rPr lang="en-US" sz="1400" b="1" dirty="0">
-                <a:solidFill>
-                  <a:srgbClr val="C00000"/>
-                </a:solidFill>
-                <a:latin typeface="Times New Roman" panose="02020603050405020304" pitchFamily="18" charset="0"/>
-                <a:ea typeface="Arial Unicode MS" panose="020B0604020202020204" pitchFamily="34" charset="-128"/>
-                <a:cs typeface="Times New Roman" panose="02020603050405020304" pitchFamily="18" charset="0"/>
-              </a:rPr>
-              <a:t>Theoretical description</a:t>
-            </a:r>
-          </a:p>
-          <a:p>
-            <a:pPr lvl="1">
-              <a:spcAft>
-                <a:spcPts val="600"/>
-              </a:spcAft>
-            </a:pPr>
-            <a:r>
-              <a:rPr lang="en-US" sz="1400" b="1" dirty="0">
-                <a:solidFill>
-                  <a:srgbClr val="C00000"/>
-                </a:solidFill>
-                <a:latin typeface="Times New Roman" panose="02020603050405020304" pitchFamily="18" charset="0"/>
-                <a:ea typeface="Arial Unicode MS" panose="020B0604020202020204" pitchFamily="34" charset="-128"/>
-                <a:cs typeface="Times New Roman" panose="02020603050405020304" pitchFamily="18" charset="0"/>
-              </a:rPr>
-              <a:t>Fitting procedure</a:t>
-            </a:r>
-          </a:p>
-          <a:p>
-            <a:pPr lvl="1">
-              <a:spcAft>
-                <a:spcPts val="600"/>
-              </a:spcAft>
-            </a:pPr>
-            <a:r>
-              <a:rPr lang="en-US" sz="1400" b="1" dirty="0">
-                <a:solidFill>
-                  <a:srgbClr val="C00000"/>
-                </a:solidFill>
-                <a:latin typeface="Times New Roman" panose="02020603050405020304" pitchFamily="18" charset="0"/>
-                <a:ea typeface="Arial Unicode MS" panose="020B0604020202020204" pitchFamily="34" charset="-128"/>
-                <a:cs typeface="Times New Roman" panose="02020603050405020304" pitchFamily="18" charset="0"/>
-              </a:rPr>
-              <a:t>Energy evolution</a:t>
+              <a:t>Z channel has been selected (code 221) for these studies</a:t>
             </a:r>
           </a:p>
           <a:p>
@@ -3916,52 +5001,103 @@
               </a:spcAft>
             </a:pPr>
             <a:r>
-              <a:rPr lang="en-US" sz="1400" dirty="0">
+              <a:rPr lang="en-US" sz="1800" dirty="0">
                 <a:latin typeface="Times New Roman" panose="02020603050405020304" pitchFamily="18" charset="0"/>
                 <a:ea typeface="Arial Unicode MS" panose="020B0604020202020204" pitchFamily="34" charset="-128"/>
                 <a:cs typeface="Times New Roman" panose="02020603050405020304" pitchFamily="18" charset="0"/>
               </a:rPr>
-              <a:t>Inclusive Hadron Spectra</a:t>
-            </a:r>
-          </a:p>
-          <a:p>
-            <a:pPr lvl="1">
+              <a:t>Differential distributions of (1-T) and C are compared to perturbative predictions at NNLO using the MINOS fitting routine in ROOT</a:t>
+            </a:r>
+          </a:p>
+          <a:p>
+            <a:pPr>
               <a:spcAft>
                 <a:spcPts val="600"/>
               </a:spcAft>
             </a:pPr>
             <a:r>
-              <a:rPr lang="en-US" sz="1400" dirty="0">
+              <a:rPr lang="en-US" sz="1800" dirty="0">
                 <a:latin typeface="Times New Roman" panose="02020603050405020304" pitchFamily="18" charset="0"/>
                 <a:ea typeface="Arial Unicode MS" panose="020B0604020202020204" pitchFamily="34" charset="-128"/>
                 <a:cs typeface="Times New Roman" panose="02020603050405020304" pitchFamily="18" charset="0"/>
               </a:rPr>
-              <a:t>Charged hadron multiplicity</a:t>
-            </a:r>
-          </a:p>
-          <a:p>
-            <a:pPr lvl="1">
+              <a:t>Values of </a:t>
+            </a:r>
+            <a:r>
+              <a:rPr lang="el-GR" sz="1800" dirty="0">
+                <a:latin typeface="Times New Roman" panose="02020603050405020304" pitchFamily="18" charset="0"/>
+                <a:ea typeface="Arial Unicode MS" panose="020B0604020202020204" pitchFamily="34" charset="-128"/>
+                <a:cs typeface="Times New Roman" panose="02020603050405020304" pitchFamily="18" charset="0"/>
+              </a:rPr>
+              <a:t>α</a:t>
+            </a:r>
+            <a:r>
+              <a:rPr lang="en-US" sz="1800" baseline="-25000" dirty="0">
+                <a:latin typeface="Times New Roman" panose="02020603050405020304" pitchFamily="18" charset="0"/>
+                <a:ea typeface="Arial Unicode MS" panose="020B0604020202020204" pitchFamily="34" charset="-128"/>
+                <a:cs typeface="Times New Roman" panose="02020603050405020304" pitchFamily="18" charset="0"/>
+              </a:rPr>
+              <a:t>s</a:t>
+            </a:r>
+            <a:r>
+              <a:rPr lang="en-US" sz="1800" dirty="0">
+                <a:latin typeface="Times New Roman" panose="02020603050405020304" pitchFamily="18" charset="0"/>
+                <a:ea typeface="Arial Unicode MS" panose="020B0604020202020204" pitchFamily="34" charset="-128"/>
+                <a:cs typeface="Times New Roman" panose="02020603050405020304" pitchFamily="18" charset="0"/>
+              </a:rPr>
+              <a:t> extracted at each energy are averaged for a final value</a:t>
+            </a:r>
+          </a:p>
+          <a:p>
+            <a:pPr>
               <a:spcAft>
                 <a:spcPts val="600"/>
               </a:spcAft>
             </a:pPr>
             <a:r>
-              <a:rPr lang="en-US" sz="1400" dirty="0">
+              <a:rPr lang="en-US" sz="1800" dirty="0">
                 <a:latin typeface="Times New Roman" panose="02020603050405020304" pitchFamily="18" charset="0"/>
                 <a:ea typeface="Arial Unicode MS" panose="020B0604020202020204" pitchFamily="34" charset="-128"/>
                 <a:cs typeface="Times New Roman" panose="02020603050405020304" pitchFamily="18" charset="0"/>
               </a:rPr>
-              <a:t>Momentum distributions and peaks</a:t>
-            </a:r>
+              <a:t>Results are compared with previous values obtained from ALEPH and L3 along with the 3-loop running prediction</a:t>
+            </a:r>
+          </a:p>
+          <a:p>
+            <a:pPr>
+              <a:spcAft>
+                <a:spcPts val="600"/>
+              </a:spcAft>
+            </a:pPr>
+            <a:r>
+              <a:rPr lang="en-US" sz="1800" dirty="0">
+                <a:latin typeface="Times New Roman" panose="02020603050405020304" pitchFamily="18" charset="0"/>
+                <a:ea typeface="Arial Unicode MS" panose="020B0604020202020204" pitchFamily="34" charset="-128"/>
+                <a:cs typeface="Times New Roman" panose="02020603050405020304" pitchFamily="18" charset="0"/>
+              </a:rPr>
+              <a:t>In this presentation, we briefly go through the implemented workflow</a:t>
+            </a:r>
+          </a:p>
+          <a:p>
+            <a:pPr>
+              <a:spcAft>
+                <a:spcPts val="600"/>
+              </a:spcAft>
+            </a:pPr>
+            <a:endParaRPr lang="en-US" sz="1800" dirty="0">
+              <a:latin typeface="Times New Roman" panose="02020603050405020304" pitchFamily="18" charset="0"/>
+              <a:ea typeface="Arial Unicode MS" panose="020B0604020202020204" pitchFamily="34" charset="-128"/>
+              <a:cs typeface="Times New Roman" panose="02020603050405020304" pitchFamily="18" charset="0"/>
+            </a:endParaRPr>
           </a:p>
         </p:txBody>
       </p:sp>
       <p:pic>
         <p:nvPicPr>
-          <p:cNvPr id="3" name="Picture 2">
+          <p:cNvPr id="4" name="Picture 3">
             <a:extLst>
               <a:ext uri="{FF2B5EF4-FFF2-40B4-BE49-F238E27FC236}">
-                <a16:creationId xmlns:a16="http://schemas.microsoft.com/office/drawing/2014/main" id="{31FECB16-E955-DD18-665D-2D9E9FDD63B9}"/>
+                <a16:creationId xmlns:a16="http://schemas.microsoft.com/office/drawing/2014/main" id="{453C7385-812E-6BE8-4C9F-F23A44648582}"/>
               </a:ext>
             </a:extLst>
           </p:cNvPr>
@@ -3972,14 +5108,15 @@
         </p:nvPicPr>
         <p:blipFill>
           <a:blip r:embed="rId2"/>
+          <a:srcRect r="51185"/>
           <a:stretch>
             <a:fillRect/>
           </a:stretch>
         </p:blipFill>
         <p:spPr>
           <a:xfrm>
-            <a:off x="5886013" y="1562318"/>
-            <a:ext cx="5187307" cy="3530541"/>
+            <a:off x="7523751" y="337606"/>
+            <a:ext cx="4461773" cy="6331614"/>
           </a:xfrm>
           <a:prstGeom prst="rect">
             <a:avLst/>
@@ -4007,7 +5144,7 @@
         <p:cNvPr id="1" name="">
           <a:extLst>
             <a:ext uri="{FF2B5EF4-FFF2-40B4-BE49-F238E27FC236}">
-              <a16:creationId xmlns:a16="http://schemas.microsoft.com/office/drawing/2014/main" id="{91BA37A6-D2E8-E9AE-2074-A1EF3B02A58C}"/>
+              <a16:creationId xmlns:a16="http://schemas.microsoft.com/office/drawing/2014/main" id="{5BEA871A-9C54-C770-61AB-BF964F7EADC5}"/>
             </a:ext>
           </a:extLst>
         </p:cNvPr>
@@ -4027,7 +5164,7 @@
           <p:cNvPr id="5" name="Title 4">
             <a:extLst>
               <a:ext uri="{FF2B5EF4-FFF2-40B4-BE49-F238E27FC236}">
-                <a16:creationId xmlns:a16="http://schemas.microsoft.com/office/drawing/2014/main" id="{824D1469-70A8-1B41-9EDE-5BB5EF62F7DF}"/>
+                <a16:creationId xmlns:a16="http://schemas.microsoft.com/office/drawing/2014/main" id="{2967FA75-04CA-AE07-56AA-9023FB52F627}"/>
               </a:ext>
             </a:extLst>
           </p:cNvPr>
@@ -4056,7 +5193,7 @@
                 <a:ea typeface="Arial Unicode MS" panose="020B0604020202020204" pitchFamily="34" charset="-128"/>
                 <a:cs typeface="Times New Roman" panose="02020603050405020304" pitchFamily="18" charset="0"/>
               </a:rPr>
-              <a:t>Workflow – Theory coefficients</a:t>
+              <a:t>Validation with LEP data (5M samples with hadronisation)</a:t>
             </a:r>
             <a:endParaRPr lang="en-IN" sz="2800" b="1" dirty="0">
               <a:latin typeface="Times New Roman" panose="02020603050405020304" pitchFamily="18" charset="0"/>
@@ -4068,10 +5205,10 @@
       </p:sp>
       <p:pic>
         <p:nvPicPr>
-          <p:cNvPr id="10" name="Picture 9">
+          <p:cNvPr id="3" name="Picture 2" descr="A graph of a number of cells&#10;&#10;AI-generated content may be incorrect.">
             <a:extLst>
               <a:ext uri="{FF2B5EF4-FFF2-40B4-BE49-F238E27FC236}">
-                <a16:creationId xmlns:a16="http://schemas.microsoft.com/office/drawing/2014/main" id="{8C5FB75B-D2A0-232C-66D9-490E56AA6CEC}"/>
+                <a16:creationId xmlns:a16="http://schemas.microsoft.com/office/drawing/2014/main" id="{04FF4B86-3AE6-B865-2EC9-ACF99ACEEB2A}"/>
               </a:ext>
             </a:extLst>
           </p:cNvPr>
@@ -4081,32 +5218,34 @@
           <p:nvPr/>
         </p:nvPicPr>
         <p:blipFill>
-          <a:blip r:embed="rId2"/>
+          <a:blip r:embed="rId2">
+            <a:extLst>
+              <a:ext uri="{28A0092B-C50C-407E-A947-70E740481C1C}">
+                <a14:useLocalDpi xmlns:a14="http://schemas.microsoft.com/office/drawing/2010/main" val="0"/>
+              </a:ext>
+            </a:extLst>
+          </a:blip>
+          <a:srcRect b="50000"/>
           <a:stretch>
             <a:fillRect/>
           </a:stretch>
         </p:blipFill>
         <p:spPr>
           <a:xfrm>
-            <a:off x="63660" y="3782578"/>
-            <a:ext cx="5021027" cy="2527728"/>
+            <a:off x="163348" y="1114604"/>
+            <a:ext cx="5932652" cy="5435932"/>
           </a:xfrm>
           <a:prstGeom prst="rect">
             <a:avLst/>
           </a:prstGeom>
-          <a:ln>
-            <a:solidFill>
-              <a:srgbClr val="FFC000"/>
-            </a:solidFill>
-          </a:ln>
         </p:spPr>
       </p:pic>
       <p:pic>
         <p:nvPicPr>
-          <p:cNvPr id="12" name="Picture 11">
+          <p:cNvPr id="4" name="Picture 3" descr="A graph of a number of cells&#10;&#10;AI-generated content may be incorrect.">
             <a:extLst>
               <a:ext uri="{FF2B5EF4-FFF2-40B4-BE49-F238E27FC236}">
-                <a16:creationId xmlns:a16="http://schemas.microsoft.com/office/drawing/2014/main" id="{98DCAA49-082F-3988-C235-FEF8F8B74EA3}"/>
+                <a16:creationId xmlns:a16="http://schemas.microsoft.com/office/drawing/2014/main" id="{F04DF0E9-9D9D-6CFA-76CB-13E6FC216A69}"/>
               </a:ext>
             </a:extLst>
           </p:cNvPr>
@@ -4116,278 +5255,32 @@
           <p:nvPr/>
         </p:nvPicPr>
         <p:blipFill>
-          <a:blip r:embed="rId3"/>
+          <a:blip r:embed="rId2">
+            <a:extLst>
+              <a:ext uri="{28A0092B-C50C-407E-A947-70E740481C1C}">
+                <a14:useLocalDpi xmlns:a14="http://schemas.microsoft.com/office/drawing/2010/main" val="0"/>
+              </a:ext>
+            </a:extLst>
+          </a:blip>
+          <a:srcRect t="50000"/>
           <a:stretch>
             <a:fillRect/>
           </a:stretch>
         </p:blipFill>
         <p:spPr>
           <a:xfrm>
-            <a:off x="63660" y="1209734"/>
-            <a:ext cx="2511707" cy="2527728"/>
+            <a:off x="6096000" y="1114602"/>
+            <a:ext cx="5932650" cy="5435932"/>
           </a:xfrm>
           <a:prstGeom prst="rect">
             <a:avLst/>
           </a:prstGeom>
-          <a:ln>
-            <a:solidFill>
-              <a:srgbClr val="990000"/>
-            </a:solidFill>
-          </a:ln>
         </p:spPr>
       </p:pic>
-      <p:pic>
-        <p:nvPicPr>
-          <p:cNvPr id="16" name="Picture 15">
-            <a:extLst>
-              <a:ext uri="{FF2B5EF4-FFF2-40B4-BE49-F238E27FC236}">
-                <a16:creationId xmlns:a16="http://schemas.microsoft.com/office/drawing/2014/main" id="{9D1AD91B-327D-4EDF-FA9D-2C8D184B279D}"/>
-              </a:ext>
-            </a:extLst>
-          </p:cNvPr>
-          <p:cNvPicPr>
-            <a:picLocks noChangeAspect="1"/>
-          </p:cNvPicPr>
-          <p:nvPr/>
-        </p:nvPicPr>
-        <p:blipFill>
-          <a:blip r:embed="rId4"/>
-          <a:stretch>
-            <a:fillRect/>
-          </a:stretch>
-        </p:blipFill>
-        <p:spPr>
-          <a:xfrm>
-            <a:off x="6153579" y="1268213"/>
-            <a:ext cx="2209704" cy="5316016"/>
-          </a:xfrm>
-          <a:prstGeom prst="rect">
-            <a:avLst/>
-          </a:prstGeom>
-          <a:ln>
-            <a:solidFill>
-              <a:srgbClr val="990000"/>
-            </a:solidFill>
-          </a:ln>
-        </p:spPr>
-      </p:pic>
-      <p:pic>
-        <p:nvPicPr>
-          <p:cNvPr id="18" name="Picture 17">
-            <a:extLst>
-              <a:ext uri="{FF2B5EF4-FFF2-40B4-BE49-F238E27FC236}">
-                <a16:creationId xmlns:a16="http://schemas.microsoft.com/office/drawing/2014/main" id="{A025CB18-9547-E3AE-3E42-18EAABCA9280}"/>
-              </a:ext>
-            </a:extLst>
-          </p:cNvPr>
-          <p:cNvPicPr>
-            <a:picLocks noChangeAspect="1"/>
-          </p:cNvPicPr>
-          <p:nvPr/>
-        </p:nvPicPr>
-        <p:blipFill>
-          <a:blip r:embed="rId5"/>
-          <a:stretch>
-            <a:fillRect/>
-          </a:stretch>
-        </p:blipFill>
-        <p:spPr>
-          <a:xfrm>
-            <a:off x="8485013" y="1268214"/>
-            <a:ext cx="3643327" cy="5316016"/>
-          </a:xfrm>
-          <a:prstGeom prst="rect">
-            <a:avLst/>
-          </a:prstGeom>
-          <a:ln>
-            <a:solidFill>
-              <a:srgbClr val="FFC000"/>
-            </a:solidFill>
-          </a:ln>
-        </p:spPr>
-      </p:pic>
-      <p:cxnSp>
-        <p:nvCxnSpPr>
-          <p:cNvPr id="20" name="Straight Arrow Connector 19">
-            <a:extLst>
-              <a:ext uri="{FF2B5EF4-FFF2-40B4-BE49-F238E27FC236}">
-                <a16:creationId xmlns:a16="http://schemas.microsoft.com/office/drawing/2014/main" id="{DAF5F3DB-9FF3-7671-2D56-2694E9A774AD}"/>
-              </a:ext>
-            </a:extLst>
-          </p:cNvPr>
-          <p:cNvCxnSpPr>
-            <a:stCxn id="10" idx="3"/>
-          </p:cNvCxnSpPr>
-          <p:nvPr/>
-        </p:nvCxnSpPr>
-        <p:spPr>
-          <a:xfrm>
-            <a:off x="5084687" y="5046442"/>
-            <a:ext cx="1068892" cy="0"/>
-          </a:xfrm>
-          <a:prstGeom prst="straightConnector1">
-            <a:avLst/>
-          </a:prstGeom>
-          <a:ln w="57150">
-            <a:solidFill>
-              <a:srgbClr val="C00000"/>
-            </a:solidFill>
-            <a:tailEnd type="triangle"/>
-          </a:ln>
-        </p:spPr>
-        <p:style>
-          <a:lnRef idx="1">
-            <a:schemeClr val="accent1"/>
-          </a:lnRef>
-          <a:fillRef idx="0">
-            <a:schemeClr val="accent1"/>
-          </a:fillRef>
-          <a:effectRef idx="0">
-            <a:schemeClr val="accent1"/>
-          </a:effectRef>
-          <a:fontRef idx="minor">
-            <a:schemeClr val="tx1"/>
-          </a:fontRef>
-        </p:style>
-      </p:cxnSp>
-      <p:sp>
-        <p:nvSpPr>
-          <p:cNvPr id="21" name="TextBox 20">
-            <a:extLst>
-              <a:ext uri="{FF2B5EF4-FFF2-40B4-BE49-F238E27FC236}">
-                <a16:creationId xmlns:a16="http://schemas.microsoft.com/office/drawing/2014/main" id="{779AA5FA-0153-9C7B-E48E-19374E916489}"/>
-              </a:ext>
-            </a:extLst>
-          </p:cNvPr>
-          <p:cNvSpPr txBox="1"/>
-          <p:nvPr/>
-        </p:nvSpPr>
-        <p:spPr>
-          <a:xfrm>
-            <a:off x="2621861" y="3136247"/>
-            <a:ext cx="2511707" cy="646331"/>
-          </a:xfrm>
-          <a:prstGeom prst="rect">
-            <a:avLst/>
-          </a:prstGeom>
-          <a:noFill/>
-        </p:spPr>
-        <p:txBody>
-          <a:bodyPr wrap="square" rtlCol="0">
-            <a:spAutoFit/>
-          </a:bodyPr>
-          <a:lstStyle/>
-          <a:p>
-            <a:pPr algn="ctr"/>
-            <a:r>
-              <a:rPr lang="en-US" b="1" dirty="0">
-                <a:latin typeface="Times New Roman" panose="02020603050405020304" pitchFamily="18" charset="0"/>
-                <a:cs typeface="Times New Roman" panose="02020603050405020304" pitchFamily="18" charset="0"/>
-              </a:rPr>
-              <a:t>Unbarred coefficients </a:t>
-            </a:r>
-          </a:p>
-          <a:p>
-            <a:pPr algn="ctr"/>
-            <a:r>
-              <a:rPr lang="en-US" b="1" dirty="0">
-                <a:latin typeface="Times New Roman" panose="02020603050405020304" pitchFamily="18" charset="0"/>
-                <a:cs typeface="Times New Roman" panose="02020603050405020304" pitchFamily="18" charset="0"/>
-              </a:rPr>
-              <a:t>from Weinzierl *</a:t>
-            </a:r>
-            <a:endParaRPr lang="en-GB" b="1" dirty="0">
-              <a:latin typeface="Times New Roman" panose="02020603050405020304" pitchFamily="18" charset="0"/>
-              <a:cs typeface="Times New Roman" panose="02020603050405020304" pitchFamily="18" charset="0"/>
-            </a:endParaRPr>
-          </a:p>
-        </p:txBody>
-      </p:sp>
-      <p:sp>
-        <p:nvSpPr>
-          <p:cNvPr id="22" name="TextBox 21">
-            <a:extLst>
-              <a:ext uri="{FF2B5EF4-FFF2-40B4-BE49-F238E27FC236}">
-                <a16:creationId xmlns:a16="http://schemas.microsoft.com/office/drawing/2014/main" id="{4289C30E-40BE-158F-7056-349A49BE35D7}"/>
-              </a:ext>
-            </a:extLst>
-          </p:cNvPr>
-          <p:cNvSpPr txBox="1"/>
-          <p:nvPr/>
-        </p:nvSpPr>
-        <p:spPr>
-          <a:xfrm>
-            <a:off x="6153579" y="842489"/>
-            <a:ext cx="5974761" cy="369332"/>
-          </a:xfrm>
-          <a:prstGeom prst="rect">
-            <a:avLst/>
-          </a:prstGeom>
-          <a:noFill/>
-        </p:spPr>
-        <p:txBody>
-          <a:bodyPr wrap="square" rtlCol="0">
-            <a:spAutoFit/>
-          </a:bodyPr>
-          <a:lstStyle/>
-          <a:p>
-            <a:pPr algn="ctr"/>
-            <a:r>
-              <a:rPr lang="en-US" b="1" dirty="0">
-                <a:latin typeface="Times New Roman" panose="02020603050405020304" pitchFamily="18" charset="0"/>
-                <a:cs typeface="Times New Roman" panose="02020603050405020304" pitchFamily="18" charset="0"/>
-              </a:rPr>
-              <a:t>C++ structure for coefficients of Thrust and C-parameter</a:t>
-            </a:r>
-            <a:endParaRPr lang="en-GB" b="1" dirty="0">
-              <a:latin typeface="Times New Roman" panose="02020603050405020304" pitchFamily="18" charset="0"/>
-              <a:cs typeface="Times New Roman" panose="02020603050405020304" pitchFamily="18" charset="0"/>
-            </a:endParaRPr>
-          </a:p>
-        </p:txBody>
-      </p:sp>
-      <p:sp>
-        <p:nvSpPr>
-          <p:cNvPr id="24" name="TextBox 23">
-            <a:extLst>
-              <a:ext uri="{FF2B5EF4-FFF2-40B4-BE49-F238E27FC236}">
-                <a16:creationId xmlns:a16="http://schemas.microsoft.com/office/drawing/2014/main" id="{235087A1-528C-27FC-39F5-FEA648A25880}"/>
-              </a:ext>
-            </a:extLst>
-          </p:cNvPr>
-          <p:cNvSpPr txBox="1"/>
-          <p:nvPr/>
-        </p:nvSpPr>
-        <p:spPr>
-          <a:xfrm>
-            <a:off x="69643" y="6564345"/>
-            <a:ext cx="6096964" cy="215444"/>
-          </a:xfrm>
-          <a:prstGeom prst="rect">
-            <a:avLst/>
-          </a:prstGeom>
-          <a:noFill/>
-        </p:spPr>
-        <p:txBody>
-          <a:bodyPr wrap="square">
-            <a:spAutoFit/>
-          </a:bodyPr>
-          <a:lstStyle/>
-          <a:p>
-            <a:r>
-              <a:rPr lang="en-GB" sz="800" dirty="0">
-                <a:latin typeface="Times New Roman" panose="02020603050405020304" pitchFamily="18" charset="0"/>
-                <a:cs typeface="Times New Roman" panose="02020603050405020304" pitchFamily="18" charset="0"/>
-              </a:rPr>
-              <a:t>* S. Weinzierl, Event shapes and jet rates in electron-positron annihilation at NNLO, Journal of High Energy Physics 2009, 041–041 (2009)</a:t>
-            </a:r>
-          </a:p>
-        </p:txBody>
-      </p:sp>
     </p:spTree>
     <p:extLst>
       <p:ext uri="{BB962C8B-B14F-4D97-AF65-F5344CB8AC3E}">
-        <p14:creationId xmlns:p14="http://schemas.microsoft.com/office/powerpoint/2010/main" val="3276187956"/>
+        <p14:creationId xmlns:p14="http://schemas.microsoft.com/office/powerpoint/2010/main" val="1679463855"/>
       </p:ext>
     </p:extLst>
   </p:cSld>
@@ -4489,54 +5382,11 @@
                 <a:ea typeface="Arial Unicode MS" panose="020B0604020202020204" pitchFamily="34" charset="-128"/>
                 <a:cs typeface="Times New Roman" panose="02020603050405020304" pitchFamily="18" charset="0"/>
               </a:rPr>
-              <a:t>Workflow – Theory functions</a:t>
+              <a:t>Theory functions</a:t>
             </a:r>
             <a:endParaRPr lang="en-IN" sz="2800" b="1" dirty="0">
               <a:latin typeface="Times New Roman" panose="02020603050405020304" pitchFamily="18" charset="0"/>
               <a:ea typeface="Arial Unicode MS" panose="020B0604020202020204" pitchFamily="34" charset="-128"/>
-              <a:cs typeface="Times New Roman" panose="02020603050405020304" pitchFamily="18" charset="0"/>
-            </a:endParaRPr>
-          </a:p>
-        </p:txBody>
-      </p:sp>
-      <p:sp>
-        <p:nvSpPr>
-          <p:cNvPr id="21" name="TextBox 20">
-            <a:extLst>
-              <a:ext uri="{FF2B5EF4-FFF2-40B4-BE49-F238E27FC236}">
-                <a16:creationId xmlns:a16="http://schemas.microsoft.com/office/drawing/2014/main" id="{7CB55EC8-2F90-8584-BAC5-FE7718935A44}"/>
-              </a:ext>
-            </a:extLst>
-          </p:cNvPr>
-          <p:cNvSpPr txBox="1"/>
-          <p:nvPr/>
-        </p:nvSpPr>
-        <p:spPr>
-          <a:xfrm>
-            <a:off x="181463" y="1226594"/>
-            <a:ext cx="5199597" cy="307777"/>
-          </a:xfrm>
-          <a:prstGeom prst="rect">
-            <a:avLst/>
-          </a:prstGeom>
-          <a:noFill/>
-        </p:spPr>
-        <p:txBody>
-          <a:bodyPr wrap="square" rtlCol="0">
-            <a:spAutoFit/>
-          </a:bodyPr>
-          <a:lstStyle/>
-          <a:p>
-            <a:pPr algn="ctr"/>
-            <a:r>
-              <a:rPr lang="en-US" sz="1400" b="1" dirty="0">
-                <a:latin typeface="Times New Roman" panose="02020603050405020304" pitchFamily="18" charset="0"/>
-                <a:cs typeface="Times New Roman" panose="02020603050405020304" pitchFamily="18" charset="0"/>
-              </a:rPr>
-              <a:t>Perturbative expansion with barred coefficients</a:t>
-            </a:r>
-            <a:endParaRPr lang="en-GB" sz="1400" b="1" dirty="0">
-              <a:latin typeface="Times New Roman" panose="02020603050405020304" pitchFamily="18" charset="0"/>
               <a:cs typeface="Times New Roman" panose="02020603050405020304" pitchFamily="18" charset="0"/>
             </a:endParaRPr>
           </a:p>
@@ -4608,8 +5458,8 @@
         </p:blipFill>
         <p:spPr>
           <a:xfrm>
-            <a:off x="206476" y="1536953"/>
-            <a:ext cx="5149575" cy="3703899"/>
+            <a:off x="179987" y="955696"/>
+            <a:ext cx="6087704" cy="4378661"/>
           </a:xfrm>
           <a:prstGeom prst="rect">
             <a:avLst/>
@@ -4643,8 +5493,8 @@
         </p:blipFill>
         <p:spPr>
           <a:xfrm>
-            <a:off x="206475" y="5368173"/>
-            <a:ext cx="5149575" cy="967072"/>
+            <a:off x="179987" y="5368172"/>
+            <a:ext cx="6087704" cy="1143249"/>
           </a:xfrm>
           <a:prstGeom prst="rect">
             <a:avLst/>
@@ -4670,8 +5520,8 @@
         </p:nvSpPr>
         <p:spPr>
           <a:xfrm>
-            <a:off x="468775" y="3622876"/>
-            <a:ext cx="4572000" cy="462987"/>
+            <a:off x="428263" y="3446946"/>
+            <a:ext cx="5474826" cy="462987"/>
           </a:xfrm>
           <a:prstGeom prst="roundRect">
             <a:avLst/>
@@ -4778,8 +5628,8 @@
         </p:nvCxnSpPr>
         <p:spPr>
           <a:xfrm>
-            <a:off x="5040775" y="3854370"/>
-            <a:ext cx="2301578" cy="1243228"/>
+            <a:off x="5903089" y="3678440"/>
+            <a:ext cx="1439264" cy="1419158"/>
           </a:xfrm>
           <a:prstGeom prst="straightConnector1">
             <a:avLst/>
@@ -4872,8 +5722,8 @@
         </p:nvSpPr>
         <p:spPr>
           <a:xfrm>
-            <a:off x="1496472" y="4601935"/>
-            <a:ext cx="2569580" cy="638917"/>
+            <a:off x="1851949" y="4601935"/>
+            <a:ext cx="2714263" cy="727156"/>
           </a:xfrm>
           <a:prstGeom prst="roundRect">
             <a:avLst/>
@@ -4988,6 +5838,55 @@
           </a:ln>
         </p:spPr>
       </p:pic>
+      <p:sp>
+        <p:nvSpPr>
+          <p:cNvPr id="4" name="TextBox 3">
+            <a:extLst>
+              <a:ext uri="{FF2B5EF4-FFF2-40B4-BE49-F238E27FC236}">
+                <a16:creationId xmlns:a16="http://schemas.microsoft.com/office/drawing/2014/main" id="{8BFF517E-71CE-CEE7-12F0-16C581B2FBC8}"/>
+              </a:ext>
+            </a:extLst>
+          </p:cNvPr>
+          <p:cNvSpPr txBox="1"/>
+          <p:nvPr/>
+        </p:nvSpPr>
+        <p:spPr>
+          <a:xfrm>
+            <a:off x="3960793" y="2918460"/>
+            <a:ext cx="2243237" cy="523220"/>
+          </a:xfrm>
+          <a:prstGeom prst="rect">
+            <a:avLst/>
+          </a:prstGeom>
+          <a:noFill/>
+        </p:spPr>
+        <p:txBody>
+          <a:bodyPr wrap="square" rtlCol="0">
+            <a:spAutoFit/>
+          </a:bodyPr>
+          <a:lstStyle/>
+          <a:p>
+            <a:pPr algn="ctr"/>
+            <a:r>
+              <a:rPr lang="en-US" sz="1400" b="1" dirty="0">
+                <a:solidFill>
+                  <a:srgbClr val="C00000"/>
+                </a:solidFill>
+                <a:latin typeface="Times New Roman" panose="02020603050405020304" pitchFamily="18" charset="0"/>
+                <a:cs typeface="Times New Roman" panose="02020603050405020304" pitchFamily="18" charset="0"/>
+              </a:rPr>
+              <a:t>Perturbative expression with unbarred coefficients </a:t>
+            </a:r>
+            <a:endParaRPr lang="en-GB" sz="1400" b="1" dirty="0">
+              <a:solidFill>
+                <a:srgbClr val="C00000"/>
+              </a:solidFill>
+              <a:latin typeface="Times New Roman" panose="02020603050405020304" pitchFamily="18" charset="0"/>
+              <a:cs typeface="Times New Roman" panose="02020603050405020304" pitchFamily="18" charset="0"/>
+            </a:endParaRPr>
+          </a:p>
+        </p:txBody>
+      </p:sp>
     </p:spTree>
     <p:extLst>
       <p:ext uri="{BB962C8B-B14F-4D97-AF65-F5344CB8AC3E}">
@@ -5009,7 +5908,7 @@
         <p:cNvPr id="1" name="">
           <a:extLst>
             <a:ext uri="{FF2B5EF4-FFF2-40B4-BE49-F238E27FC236}">
-              <a16:creationId xmlns:a16="http://schemas.microsoft.com/office/drawing/2014/main" id="{E9BC41B6-AC70-48C3-6BF2-9980E19FF4C6}"/>
+              <a16:creationId xmlns:a16="http://schemas.microsoft.com/office/drawing/2014/main" id="{91BA37A6-D2E8-E9AE-2074-A1EF3B02A58C}"/>
             </a:ext>
           </a:extLst>
         </p:cNvPr>
@@ -5029,7 +5928,7 @@
           <p:cNvPr id="5" name="Title 4">
             <a:extLst>
               <a:ext uri="{FF2B5EF4-FFF2-40B4-BE49-F238E27FC236}">
-                <a16:creationId xmlns:a16="http://schemas.microsoft.com/office/drawing/2014/main" id="{51311BFD-DFD2-BEED-EEEF-742F2EC835C2}"/>
+                <a16:creationId xmlns:a16="http://schemas.microsoft.com/office/drawing/2014/main" id="{824D1469-70A8-1B41-9EDE-5BB5EF62F7DF}"/>
               </a:ext>
             </a:extLst>
           </p:cNvPr>
@@ -5058,7 +5957,7 @@
                 <a:ea typeface="Arial Unicode MS" panose="020B0604020202020204" pitchFamily="34" charset="-128"/>
                 <a:cs typeface="Times New Roman" panose="02020603050405020304" pitchFamily="18" charset="0"/>
               </a:rPr>
-              <a:t>Workflow – TF1 functions</a:t>
+              <a:t>Theory coefficients</a:t>
             </a:r>
             <a:endParaRPr lang="en-IN" sz="2800" b="1" dirty="0">
               <a:latin typeface="Times New Roman" panose="02020603050405020304" pitchFamily="18" charset="0"/>
@@ -5073,7 +5972,7 @@
           <p:cNvPr id="10" name="Picture 9">
             <a:extLst>
               <a:ext uri="{FF2B5EF4-FFF2-40B4-BE49-F238E27FC236}">
-                <a16:creationId xmlns:a16="http://schemas.microsoft.com/office/drawing/2014/main" id="{472E899C-22CF-5D12-BE9F-A6BB295A09AF}"/>
+                <a16:creationId xmlns:a16="http://schemas.microsoft.com/office/drawing/2014/main" id="{8C5FB75B-D2A0-232C-66D9-490E56AA6CEC}"/>
               </a:ext>
             </a:extLst>
           </p:cNvPr>
@@ -5090,20 +5989,25 @@
         </p:blipFill>
         <p:spPr>
           <a:xfrm>
-            <a:off x="206476" y="1155360"/>
-            <a:ext cx="11804610" cy="3385348"/>
+            <a:off x="63660" y="3782578"/>
+            <a:ext cx="5021027" cy="2527728"/>
           </a:xfrm>
           <a:prstGeom prst="rect">
             <a:avLst/>
           </a:prstGeom>
+          <a:ln>
+            <a:solidFill>
+              <a:srgbClr val="FFC000"/>
+            </a:solidFill>
+          </a:ln>
         </p:spPr>
       </p:pic>
       <p:pic>
         <p:nvPicPr>
-          <p:cNvPr id="14" name="Picture 13">
+          <p:cNvPr id="12" name="Picture 11">
             <a:extLst>
               <a:ext uri="{FF2B5EF4-FFF2-40B4-BE49-F238E27FC236}">
-                <a16:creationId xmlns:a16="http://schemas.microsoft.com/office/drawing/2014/main" id="{EED83112-FA01-F4CA-EDF0-2E1D7CDB2574}"/>
+                <a16:creationId xmlns:a16="http://schemas.microsoft.com/office/drawing/2014/main" id="{98DCAA49-082F-3988-C235-FEF8F8B74EA3}"/>
               </a:ext>
             </a:extLst>
           </p:cNvPr>
@@ -5120,18 +6024,271 @@
         </p:blipFill>
         <p:spPr>
           <a:xfrm>
-            <a:off x="3994988" y="4594185"/>
-            <a:ext cx="4227586" cy="2075035"/>
+            <a:off x="63660" y="1209734"/>
+            <a:ext cx="2511707" cy="2527728"/>
           </a:xfrm>
           <a:prstGeom prst="rect">
             <a:avLst/>
           </a:prstGeom>
+          <a:ln>
+            <a:solidFill>
+              <a:srgbClr val="990000"/>
+            </a:solidFill>
+          </a:ln>
         </p:spPr>
       </p:pic>
+      <p:pic>
+        <p:nvPicPr>
+          <p:cNvPr id="16" name="Picture 15">
+            <a:extLst>
+              <a:ext uri="{FF2B5EF4-FFF2-40B4-BE49-F238E27FC236}">
+                <a16:creationId xmlns:a16="http://schemas.microsoft.com/office/drawing/2014/main" id="{9D1AD91B-327D-4EDF-FA9D-2C8D184B279D}"/>
+              </a:ext>
+            </a:extLst>
+          </p:cNvPr>
+          <p:cNvPicPr>
+            <a:picLocks noChangeAspect="1"/>
+          </p:cNvPicPr>
+          <p:nvPr/>
+        </p:nvPicPr>
+        <p:blipFill>
+          <a:blip r:embed="rId4"/>
+          <a:stretch>
+            <a:fillRect/>
+          </a:stretch>
+        </p:blipFill>
+        <p:spPr>
+          <a:xfrm>
+            <a:off x="6153579" y="1268213"/>
+            <a:ext cx="2209704" cy="5316016"/>
+          </a:xfrm>
+          <a:prstGeom prst="rect">
+            <a:avLst/>
+          </a:prstGeom>
+          <a:ln>
+            <a:solidFill>
+              <a:srgbClr val="990000"/>
+            </a:solidFill>
+          </a:ln>
+        </p:spPr>
+      </p:pic>
+      <p:pic>
+        <p:nvPicPr>
+          <p:cNvPr id="18" name="Picture 17">
+            <a:extLst>
+              <a:ext uri="{FF2B5EF4-FFF2-40B4-BE49-F238E27FC236}">
+                <a16:creationId xmlns:a16="http://schemas.microsoft.com/office/drawing/2014/main" id="{A025CB18-9547-E3AE-3E42-18EAABCA9280}"/>
+              </a:ext>
+            </a:extLst>
+          </p:cNvPr>
+          <p:cNvPicPr>
+            <a:picLocks noChangeAspect="1"/>
+          </p:cNvPicPr>
+          <p:nvPr/>
+        </p:nvPicPr>
+        <p:blipFill>
+          <a:blip r:embed="rId5"/>
+          <a:stretch>
+            <a:fillRect/>
+          </a:stretch>
+        </p:blipFill>
+        <p:spPr>
+          <a:xfrm>
+            <a:off x="8485013" y="1268214"/>
+            <a:ext cx="3643327" cy="5316016"/>
+          </a:xfrm>
+          <a:prstGeom prst="rect">
+            <a:avLst/>
+          </a:prstGeom>
+          <a:ln>
+            <a:solidFill>
+              <a:srgbClr val="FFC000"/>
+            </a:solidFill>
+          </a:ln>
+        </p:spPr>
+      </p:pic>
+      <p:cxnSp>
+        <p:nvCxnSpPr>
+          <p:cNvPr id="20" name="Straight Arrow Connector 19">
+            <a:extLst>
+              <a:ext uri="{FF2B5EF4-FFF2-40B4-BE49-F238E27FC236}">
+                <a16:creationId xmlns:a16="http://schemas.microsoft.com/office/drawing/2014/main" id="{DAF5F3DB-9FF3-7671-2D56-2694E9A774AD}"/>
+              </a:ext>
+            </a:extLst>
+          </p:cNvPr>
+          <p:cNvCxnSpPr>
+            <a:stCxn id="10" idx="3"/>
+          </p:cNvCxnSpPr>
+          <p:nvPr/>
+        </p:nvCxnSpPr>
+        <p:spPr>
+          <a:xfrm>
+            <a:off x="5084687" y="5046442"/>
+            <a:ext cx="1068892" cy="0"/>
+          </a:xfrm>
+          <a:prstGeom prst="straightConnector1">
+            <a:avLst/>
+          </a:prstGeom>
+          <a:ln w="57150">
+            <a:solidFill>
+              <a:srgbClr val="C00000"/>
+            </a:solidFill>
+            <a:tailEnd type="triangle"/>
+          </a:ln>
+        </p:spPr>
+        <p:style>
+          <a:lnRef idx="1">
+            <a:schemeClr val="accent1"/>
+          </a:lnRef>
+          <a:fillRef idx="0">
+            <a:schemeClr val="accent1"/>
+          </a:fillRef>
+          <a:effectRef idx="0">
+            <a:schemeClr val="accent1"/>
+          </a:effectRef>
+          <a:fontRef idx="minor">
+            <a:schemeClr val="tx1"/>
+          </a:fontRef>
+        </p:style>
+      </p:cxnSp>
+      <p:sp>
+        <p:nvSpPr>
+          <p:cNvPr id="21" name="TextBox 20">
+            <a:extLst>
+              <a:ext uri="{FF2B5EF4-FFF2-40B4-BE49-F238E27FC236}">
+                <a16:creationId xmlns:a16="http://schemas.microsoft.com/office/drawing/2014/main" id="{779AA5FA-0153-9C7B-E48E-19374E916489}"/>
+              </a:ext>
+            </a:extLst>
+          </p:cNvPr>
+          <p:cNvSpPr txBox="1"/>
+          <p:nvPr/>
+        </p:nvSpPr>
+        <p:spPr>
+          <a:xfrm>
+            <a:off x="2621861" y="3136247"/>
+            <a:ext cx="2511707" cy="646331"/>
+          </a:xfrm>
+          <a:prstGeom prst="rect">
+            <a:avLst/>
+          </a:prstGeom>
+          <a:noFill/>
+        </p:spPr>
+        <p:txBody>
+          <a:bodyPr wrap="square" rtlCol="0">
+            <a:spAutoFit/>
+          </a:bodyPr>
+          <a:lstStyle/>
+          <a:p>
+            <a:pPr algn="ctr"/>
+            <a:r>
+              <a:rPr lang="en-US" b="1" dirty="0">
+                <a:latin typeface="Times New Roman" panose="02020603050405020304" pitchFamily="18" charset="0"/>
+                <a:cs typeface="Times New Roman" panose="02020603050405020304" pitchFamily="18" charset="0"/>
+              </a:rPr>
+              <a:t>Unbarred coefficients </a:t>
+            </a:r>
+          </a:p>
+          <a:p>
+            <a:pPr algn="ctr"/>
+            <a:r>
+              <a:rPr lang="en-US" b="1" dirty="0">
+                <a:latin typeface="Times New Roman" panose="02020603050405020304" pitchFamily="18" charset="0"/>
+                <a:cs typeface="Times New Roman" panose="02020603050405020304" pitchFamily="18" charset="0"/>
+              </a:rPr>
+              <a:t>from Weinzierl*</a:t>
+            </a:r>
+            <a:endParaRPr lang="en-GB" b="1" dirty="0">
+              <a:latin typeface="Times New Roman" panose="02020603050405020304" pitchFamily="18" charset="0"/>
+              <a:cs typeface="Times New Roman" panose="02020603050405020304" pitchFamily="18" charset="0"/>
+            </a:endParaRPr>
+          </a:p>
+        </p:txBody>
+      </p:sp>
+      <p:sp>
+        <p:nvSpPr>
+          <p:cNvPr id="22" name="TextBox 21">
+            <a:extLst>
+              <a:ext uri="{FF2B5EF4-FFF2-40B4-BE49-F238E27FC236}">
+                <a16:creationId xmlns:a16="http://schemas.microsoft.com/office/drawing/2014/main" id="{4289C30E-40BE-158F-7056-349A49BE35D7}"/>
+              </a:ext>
+            </a:extLst>
+          </p:cNvPr>
+          <p:cNvSpPr txBox="1"/>
+          <p:nvPr/>
+        </p:nvSpPr>
+        <p:spPr>
+          <a:xfrm>
+            <a:off x="6153579" y="842489"/>
+            <a:ext cx="5974761" cy="369332"/>
+          </a:xfrm>
+          <a:prstGeom prst="rect">
+            <a:avLst/>
+          </a:prstGeom>
+          <a:noFill/>
+        </p:spPr>
+        <p:txBody>
+          <a:bodyPr wrap="square" rtlCol="0">
+            <a:spAutoFit/>
+          </a:bodyPr>
+          <a:lstStyle/>
+          <a:p>
+            <a:pPr algn="ctr"/>
+            <a:r>
+              <a:rPr lang="en-US" b="1" dirty="0">
+                <a:latin typeface="Times New Roman" panose="02020603050405020304" pitchFamily="18" charset="0"/>
+                <a:cs typeface="Times New Roman" panose="02020603050405020304" pitchFamily="18" charset="0"/>
+              </a:rPr>
+              <a:t>C++ structure for coefficients of Thrust and C-parameter</a:t>
+            </a:r>
+            <a:endParaRPr lang="en-GB" b="1" dirty="0">
+              <a:latin typeface="Times New Roman" panose="02020603050405020304" pitchFamily="18" charset="0"/>
+              <a:cs typeface="Times New Roman" panose="02020603050405020304" pitchFamily="18" charset="0"/>
+            </a:endParaRPr>
+          </a:p>
+        </p:txBody>
+      </p:sp>
+      <p:sp>
+        <p:nvSpPr>
+          <p:cNvPr id="2" name="TextBox 1">
+            <a:extLst>
+              <a:ext uri="{FF2B5EF4-FFF2-40B4-BE49-F238E27FC236}">
+                <a16:creationId xmlns:a16="http://schemas.microsoft.com/office/drawing/2014/main" id="{235087A1-528C-27FC-39F5-FEA648A25880}"/>
+              </a:ext>
+            </a:extLst>
+          </p:cNvPr>
+          <p:cNvSpPr txBox="1"/>
+          <p:nvPr/>
+        </p:nvSpPr>
+        <p:spPr>
+          <a:xfrm>
+            <a:off x="69643" y="6477860"/>
+            <a:ext cx="6096964" cy="215444"/>
+          </a:xfrm>
+          <a:prstGeom prst="rect">
+            <a:avLst/>
+          </a:prstGeom>
+          <a:noFill/>
+        </p:spPr>
+        <p:txBody>
+          <a:bodyPr wrap="square">
+            <a:spAutoFit/>
+          </a:bodyPr>
+          <a:lstStyle/>
+          <a:p>
+            <a:r>
+              <a:rPr lang="en-GB" sz="800" dirty="0">
+                <a:latin typeface="Times New Roman" panose="02020603050405020304" pitchFamily="18" charset="0"/>
+                <a:cs typeface="Times New Roman" panose="02020603050405020304" pitchFamily="18" charset="0"/>
+              </a:rPr>
+              <a:t>* S. Weinzierl, Event shapes and jet rates in electron-positron annihilation at NNLO, Journal of High Energy Physics 2009, 041–041 (2009)</a:t>
+            </a:r>
+          </a:p>
+        </p:txBody>
+      </p:sp>
     </p:spTree>
     <p:extLst>
       <p:ext uri="{BB962C8B-B14F-4D97-AF65-F5344CB8AC3E}">
-        <p14:creationId xmlns:p14="http://schemas.microsoft.com/office/powerpoint/2010/main" val="1224501784"/>
+        <p14:creationId xmlns:p14="http://schemas.microsoft.com/office/powerpoint/2010/main" val="3276187956"/>
       </p:ext>
     </p:extLst>
   </p:cSld>
@@ -5198,7 +6355,7 @@
                 <a:ea typeface="Arial Unicode MS" panose="020B0604020202020204" pitchFamily="34" charset="-128"/>
                 <a:cs typeface="Times New Roman" panose="02020603050405020304" pitchFamily="18" charset="0"/>
               </a:rPr>
-              <a:t>Results – TF1 fits</a:t>
+              <a:t>TF1 fits in ROOT</a:t>
             </a:r>
             <a:endParaRPr lang="en-IN" sz="2800" b="1" dirty="0">
               <a:latin typeface="Times New Roman" panose="02020603050405020304" pitchFamily="18" charset="0"/>
@@ -5237,8 +6394,8 @@
         </p:blipFill>
         <p:spPr>
           <a:xfrm>
-            <a:off x="6003317" y="966757"/>
-            <a:ext cx="3910506" cy="4924486"/>
+            <a:off x="4979043" y="966757"/>
+            <a:ext cx="4530638" cy="5705416"/>
           </a:xfrm>
           <a:prstGeom prst="rect">
             <a:avLst/>
@@ -5274,14 +6431,57 @@
         </p:blipFill>
         <p:spPr>
           <a:xfrm>
-            <a:off x="2052031" y="966757"/>
-            <a:ext cx="3868420" cy="4924486"/>
+            <a:off x="497165" y="955696"/>
+            <a:ext cx="4481878" cy="5705416"/>
           </a:xfrm>
           <a:prstGeom prst="rect">
             <a:avLst/>
           </a:prstGeom>
         </p:spPr>
       </p:pic>
+      <p:sp>
+        <p:nvSpPr>
+          <p:cNvPr id="2" name="TextBox 1">
+            <a:extLst>
+              <a:ext uri="{FF2B5EF4-FFF2-40B4-BE49-F238E27FC236}">
+                <a16:creationId xmlns:a16="http://schemas.microsoft.com/office/drawing/2014/main" id="{7BB54856-F2DE-6443-B962-FDFCC499D529}"/>
+              </a:ext>
+            </a:extLst>
+          </p:cNvPr>
+          <p:cNvSpPr txBox="1"/>
+          <p:nvPr/>
+        </p:nvSpPr>
+        <p:spPr>
+          <a:xfrm>
+            <a:off x="9535277" y="3285184"/>
+            <a:ext cx="2475809" cy="523220"/>
+          </a:xfrm>
+          <a:prstGeom prst="rect">
+            <a:avLst/>
+          </a:prstGeom>
+          <a:noFill/>
+        </p:spPr>
+        <p:txBody>
+          <a:bodyPr wrap="square" rtlCol="0">
+            <a:spAutoFit/>
+          </a:bodyPr>
+          <a:lstStyle/>
+          <a:p>
+            <a:pPr algn="ctr"/>
+            <a:r>
+              <a:rPr lang="en-US" sz="1400" dirty="0">
+                <a:latin typeface="Times New Roman" panose="02020603050405020304" pitchFamily="18" charset="0"/>
+                <a:cs typeface="Times New Roman" panose="02020603050405020304" pitchFamily="18" charset="0"/>
+              </a:rPr>
+              <a:t>ALEPH fit ranges were used as baseline then tweaked</a:t>
+            </a:r>
+            <a:endParaRPr lang="en-GB" sz="1400" dirty="0">
+              <a:latin typeface="Times New Roman" panose="02020603050405020304" pitchFamily="18" charset="0"/>
+              <a:cs typeface="Times New Roman" panose="02020603050405020304" pitchFamily="18" charset="0"/>
+            </a:endParaRPr>
+          </a:p>
+        </p:txBody>
+      </p:sp>
     </p:spTree>
     <p:extLst>
       <p:ext uri="{BB962C8B-B14F-4D97-AF65-F5344CB8AC3E}">
@@ -5352,7 +6552,7 @@
                 <a:ea typeface="Arial Unicode MS" panose="020B0604020202020204" pitchFamily="34" charset="-128"/>
                 <a:cs typeface="Times New Roman" panose="02020603050405020304" pitchFamily="18" charset="0"/>
               </a:rPr>
-              <a:t>Results – Extracted </a:t>
+              <a:t>Extracted </a:t>
             </a:r>
             <a:r>
               <a:rPr lang="el-GR" sz="2800" b="1" dirty="0">
@@ -5369,6 +6569,14 @@
                 <a:cs typeface="Times New Roman" panose="02020603050405020304" pitchFamily="18" charset="0"/>
               </a:rPr>
               <a:t>s</a:t>
+            </a:r>
+            <a:r>
+              <a:rPr lang="en-US" sz="2800" b="1" dirty="0">
+                <a:latin typeface="Times New Roman" panose="02020603050405020304" pitchFamily="18" charset="0"/>
+                <a:ea typeface="Arial Unicode MS" panose="020B0604020202020204" pitchFamily="34" charset="-128"/>
+                <a:cs typeface="Times New Roman" panose="02020603050405020304" pitchFamily="18" charset="0"/>
+              </a:rPr>
+              <a:t> values </a:t>
             </a:r>
             <a:endParaRPr lang="en-IN" sz="2800" b="1" baseline="-25000" dirty="0">
               <a:latin typeface="Times New Roman" panose="02020603050405020304" pitchFamily="18" charset="0"/>
@@ -5400,7 +6608,7 @@
         </p:blipFill>
         <p:spPr>
           <a:xfrm>
-            <a:off x="4099056" y="1042181"/>
+            <a:off x="4099056" y="955696"/>
             <a:ext cx="4135101" cy="2652973"/>
           </a:xfrm>
           <a:prstGeom prst="rect">
@@ -5422,7 +6630,7 @@
         </p:nvSpPr>
         <p:spPr>
           <a:xfrm>
-            <a:off x="5390187" y="1809097"/>
+            <a:off x="5390187" y="1722612"/>
             <a:ext cx="526648" cy="202557"/>
           </a:xfrm>
           <a:prstGeom prst="roundRect">
@@ -5431,7 +6639,7 @@
           <a:noFill/>
           <a:ln w="28575">
             <a:solidFill>
-              <a:srgbClr val="FF0000"/>
+              <a:srgbClr val="C00000"/>
             </a:solidFill>
           </a:ln>
         </p:spPr>
@@ -5474,7 +6682,7 @@
         </p:nvSpPr>
         <p:spPr>
           <a:xfrm>
-            <a:off x="5390187" y="2500956"/>
+            <a:off x="5390187" y="2414471"/>
             <a:ext cx="526648" cy="202557"/>
           </a:xfrm>
           <a:prstGeom prst="roundRect">
@@ -5483,7 +6691,7 @@
           <a:noFill/>
           <a:ln w="28575">
             <a:solidFill>
-              <a:srgbClr val="FF0000"/>
+              <a:srgbClr val="C00000"/>
             </a:solidFill>
           </a:ln>
         </p:spPr>
@@ -5534,7 +6742,7 @@
         </p:blipFill>
         <p:spPr>
           <a:xfrm>
-            <a:off x="39040" y="4036830"/>
+            <a:off x="579436" y="3950345"/>
             <a:ext cx="4810751" cy="2441030"/>
           </a:xfrm>
           <a:prstGeom prst="rect">
@@ -5564,7 +6772,7 @@
         </p:blipFill>
         <p:spPr>
           <a:xfrm>
-            <a:off x="5150733" y="4036830"/>
+            <a:off x="5691129" y="3950345"/>
             <a:ext cx="6096964" cy="2310429"/>
           </a:xfrm>
           <a:prstGeom prst="rect">
@@ -5586,8 +6794,8 @@
         </p:nvSpPr>
         <p:spPr>
           <a:xfrm>
-            <a:off x="69643" y="6564345"/>
-            <a:ext cx="6096964" cy="215444"/>
+            <a:off x="69643" y="6477860"/>
+            <a:ext cx="6096964" cy="338554"/>
           </a:xfrm>
           <a:prstGeom prst="rect">
             <a:avLst/>
@@ -5605,7 +6813,35 @@
                 <a:latin typeface="Times New Roman" panose="02020603050405020304" pitchFamily="18" charset="0"/>
                 <a:cs typeface="Times New Roman" panose="02020603050405020304" pitchFamily="18" charset="0"/>
               </a:rPr>
-              <a:t>* S. Weinzierl, Event shapes and jet rates in electron-positron annihilation at NNLO, Journal of High Energy Physics 2009, 041–041 (2009)</a:t>
+              <a:t>G. Dissertori, A. G.-D. Ridder, T. Gehrmann, E. Glover, G. Heinrich, G. </a:t>
+            </a:r>
+            <a:r>
+              <a:rPr lang="en-GB" sz="800" dirty="0" err="1">
+                <a:latin typeface="Times New Roman" panose="02020603050405020304" pitchFamily="18" charset="0"/>
+                <a:cs typeface="Times New Roman" panose="02020603050405020304" pitchFamily="18" charset="0"/>
+              </a:rPr>
+              <a:t>Luisoni</a:t>
+            </a:r>
+            <a:r>
+              <a:rPr lang="en-GB" sz="800" dirty="0">
+                <a:latin typeface="Times New Roman" panose="02020603050405020304" pitchFamily="18" charset="0"/>
+                <a:cs typeface="Times New Roman" panose="02020603050405020304" pitchFamily="18" charset="0"/>
+              </a:rPr>
+              <a:t>, and H. Stenzel, Determination of the strong coupling constant using matched </a:t>
+            </a:r>
+            <a:r>
+              <a:rPr lang="en-GB" sz="800" dirty="0" err="1">
+                <a:latin typeface="Times New Roman" panose="02020603050405020304" pitchFamily="18" charset="0"/>
+                <a:cs typeface="Times New Roman" panose="02020603050405020304" pitchFamily="18" charset="0"/>
+              </a:rPr>
+              <a:t>nnlo+nlla</a:t>
+            </a:r>
+            <a:r>
+              <a:rPr lang="en-GB" sz="800" dirty="0">
+                <a:latin typeface="Times New Roman" panose="02020603050405020304" pitchFamily="18" charset="0"/>
+                <a:cs typeface="Times New Roman" panose="02020603050405020304" pitchFamily="18" charset="0"/>
+              </a:rPr>
+              <a:t> predictions for hadronic event shapes in e+e annihilations, Journal of High Energy Physics 2009,036–036 (2009).</a:t>
             </a:r>
           </a:p>
         </p:txBody>
@@ -5624,7 +6860,7 @@
         </p:nvSpPr>
         <p:spPr>
           <a:xfrm>
-            <a:off x="1035936" y="5313792"/>
+            <a:off x="1576332" y="5227307"/>
             <a:ext cx="526648" cy="202557"/>
           </a:xfrm>
           <a:prstGeom prst="roundRect">
@@ -5633,7 +6869,7 @@
           <a:noFill/>
           <a:ln w="28575">
             <a:solidFill>
-              <a:srgbClr val="FF0000"/>
+              <a:srgbClr val="C00000"/>
             </a:solidFill>
           </a:ln>
         </p:spPr>
@@ -5676,7 +6912,7 @@
         </p:nvSpPr>
         <p:spPr>
           <a:xfrm>
-            <a:off x="1736204" y="5313792"/>
+            <a:off x="2276600" y="5227307"/>
             <a:ext cx="526648" cy="202557"/>
           </a:xfrm>
           <a:prstGeom prst="roundRect">
@@ -5685,7 +6921,7 @@
           <a:noFill/>
           <a:ln w="28575">
             <a:solidFill>
-              <a:srgbClr val="FF0000"/>
+              <a:srgbClr val="C00000"/>
             </a:solidFill>
           </a:ln>
         </p:spPr>
@@ -5728,7 +6964,7 @@
         </p:nvSpPr>
         <p:spPr>
           <a:xfrm>
-            <a:off x="6108781" y="1809097"/>
+            <a:off x="6108781" y="1722612"/>
             <a:ext cx="526648" cy="202557"/>
           </a:xfrm>
           <a:prstGeom prst="roundRect">
@@ -5780,7 +7016,7 @@
         </p:nvSpPr>
         <p:spPr>
           <a:xfrm>
-            <a:off x="6108781" y="2500956"/>
+            <a:off x="6108781" y="2414471"/>
             <a:ext cx="526648" cy="202557"/>
           </a:xfrm>
           <a:prstGeom prst="roundRect">
@@ -5832,7 +7068,7 @@
         </p:nvSpPr>
         <p:spPr>
           <a:xfrm>
-            <a:off x="7460849" y="4347307"/>
+            <a:off x="8001245" y="4260822"/>
             <a:ext cx="526648" cy="202557"/>
           </a:xfrm>
           <a:prstGeom prst="roundRect">
@@ -5884,7 +7120,7 @@
         </p:nvSpPr>
         <p:spPr>
           <a:xfrm>
-            <a:off x="69644" y="3758351"/>
+            <a:off x="610040" y="3671866"/>
             <a:ext cx="4780148" cy="307777"/>
           </a:xfrm>
           <a:prstGeom prst="rect">
@@ -5927,7 +7163,7 @@
         </p:nvSpPr>
         <p:spPr>
           <a:xfrm>
-            <a:off x="5150732" y="3758351"/>
+            <a:off x="5691128" y="3671866"/>
             <a:ext cx="6096964" cy="307777"/>
           </a:xfrm>
           <a:prstGeom prst="rect">
@@ -5970,7 +7206,7 @@
         </p:nvSpPr>
         <p:spPr>
           <a:xfrm>
-            <a:off x="8097457" y="4347307"/>
+            <a:off x="8637853" y="4260822"/>
             <a:ext cx="526648" cy="202557"/>
           </a:xfrm>
           <a:prstGeom prst="roundRect">
@@ -6078,51 +7314,13 @@
                 <a:ea typeface="Arial Unicode MS" panose="020B0604020202020204" pitchFamily="34" charset="-128"/>
                 <a:cs typeface="Times New Roman" panose="02020603050405020304" pitchFamily="18" charset="0"/>
               </a:rPr>
-              <a:t>Results – Energy evolution</a:t>
+              <a:t>Energy evolution</a:t>
             </a:r>
             <a:endParaRPr lang="en-IN" sz="2800" b="1" baseline="-25000" dirty="0">
               <a:latin typeface="Times New Roman" panose="02020603050405020304" pitchFamily="18" charset="0"/>
               <a:ea typeface="Arial Unicode MS" panose="020B0604020202020204" pitchFamily="34" charset="-128"/>
               <a:cs typeface="Times New Roman" panose="02020603050405020304" pitchFamily="18" charset="0"/>
             </a:endParaRPr>
-          </a:p>
-        </p:txBody>
-      </p:sp>
-      <p:sp>
-        <p:nvSpPr>
-          <p:cNvPr id="6" name="TextBox 5">
-            <a:extLst>
-              <a:ext uri="{FF2B5EF4-FFF2-40B4-BE49-F238E27FC236}">
-                <a16:creationId xmlns:a16="http://schemas.microsoft.com/office/drawing/2014/main" id="{5A060FA3-307C-9280-C329-990A56507E0C}"/>
-              </a:ext>
-            </a:extLst>
-          </p:cNvPr>
-          <p:cNvSpPr txBox="1"/>
-          <p:nvPr/>
-        </p:nvSpPr>
-        <p:spPr>
-          <a:xfrm>
-            <a:off x="69643" y="6564345"/>
-            <a:ext cx="6096964" cy="215444"/>
-          </a:xfrm>
-          <a:prstGeom prst="rect">
-            <a:avLst/>
-          </a:prstGeom>
-          <a:noFill/>
-        </p:spPr>
-        <p:txBody>
-          <a:bodyPr wrap="square">
-            <a:spAutoFit/>
-          </a:bodyPr>
-          <a:lstStyle/>
-          <a:p>
-            <a:r>
-              <a:rPr lang="en-GB" sz="800" dirty="0">
-                <a:latin typeface="Times New Roman" panose="02020603050405020304" pitchFamily="18" charset="0"/>
-                <a:cs typeface="Times New Roman" panose="02020603050405020304" pitchFamily="18" charset="0"/>
-              </a:rPr>
-              <a:t>* ALEPH, Studies of QCD at ee centre-of-mass energies between 91-GeV and 209-GeV, Eur. Phys. J. C 35, 457 (2004).</a:t>
-            </a:r>
           </a:p>
         </p:txBody>
       </p:sp>
@@ -6154,7 +7352,7 @@
         </p:blipFill>
         <p:spPr>
           <a:xfrm>
-            <a:off x="823269" y="1041721"/>
+            <a:off x="206476" y="1041721"/>
             <a:ext cx="3650346" cy="5324565"/>
           </a:xfrm>
           <a:prstGeom prst="rect">
@@ -6184,7 +7382,7 @@
         </p:blipFill>
         <p:spPr>
           <a:xfrm>
-            <a:off x="7718387" y="1041721"/>
+            <a:off x="4508864" y="1041721"/>
             <a:ext cx="3449059" cy="5324565"/>
           </a:xfrm>
           <a:prstGeom prst="rect">
@@ -6206,7 +7404,7 @@
         </p:nvSpPr>
         <p:spPr>
           <a:xfrm>
-            <a:off x="2648442" y="4810294"/>
+            <a:off x="2031649" y="4810294"/>
             <a:ext cx="239442" cy="202557"/>
           </a:xfrm>
           <a:prstGeom prst="roundRect">
@@ -6258,7 +7456,7 @@
         </p:nvSpPr>
         <p:spPr>
           <a:xfrm>
-            <a:off x="10478716" y="3380821"/>
+            <a:off x="7269193" y="3380821"/>
             <a:ext cx="239442" cy="202557"/>
           </a:xfrm>
           <a:prstGeom prst="roundRect">
@@ -6308,13 +7506,14 @@
           <p:cNvCxnSpPr>
             <a:cxnSpLocks/>
             <a:stCxn id="15" idx="3"/>
+            <a:endCxn id="20" idx="1"/>
           </p:cNvCxnSpPr>
           <p:nvPr/>
         </p:nvCxnSpPr>
         <p:spPr>
           <a:xfrm flipV="1">
-            <a:off x="2887884" y="3489767"/>
-            <a:ext cx="7590832" cy="1421806"/>
+            <a:off x="2271091" y="3482100"/>
+            <a:ext cx="4998102" cy="1429473"/>
           </a:xfrm>
           <a:prstGeom prst="straightConnector1">
             <a:avLst/>
@@ -6322,6 +7521,281 @@
           <a:ln w="38100">
             <a:solidFill>
               <a:srgbClr val="009B01"/>
+            </a:solidFill>
+            <a:tailEnd type="triangle"/>
+          </a:ln>
+        </p:spPr>
+        <p:style>
+          <a:lnRef idx="1">
+            <a:schemeClr val="accent1"/>
+          </a:lnRef>
+          <a:fillRef idx="0">
+            <a:schemeClr val="accent1"/>
+          </a:fillRef>
+          <a:effectRef idx="0">
+            <a:schemeClr val="accent1"/>
+          </a:effectRef>
+          <a:fontRef idx="minor">
+            <a:schemeClr val="tx1"/>
+          </a:fontRef>
+        </p:style>
+      </p:cxnSp>
+      <p:sp>
+        <p:nvSpPr>
+          <p:cNvPr id="2" name="TextBox 1">
+            <a:extLst>
+              <a:ext uri="{FF2B5EF4-FFF2-40B4-BE49-F238E27FC236}">
+                <a16:creationId xmlns:a16="http://schemas.microsoft.com/office/drawing/2014/main" id="{5A060FA3-307C-9280-C329-990A56507E0C}"/>
+              </a:ext>
+            </a:extLst>
+          </p:cNvPr>
+          <p:cNvSpPr txBox="1"/>
+          <p:nvPr/>
+        </p:nvSpPr>
+        <p:spPr>
+          <a:xfrm>
+            <a:off x="69643" y="6477860"/>
+            <a:ext cx="6096964" cy="215444"/>
+          </a:xfrm>
+          <a:prstGeom prst="rect">
+            <a:avLst/>
+          </a:prstGeom>
+          <a:noFill/>
+        </p:spPr>
+        <p:txBody>
+          <a:bodyPr wrap="square">
+            <a:spAutoFit/>
+          </a:bodyPr>
+          <a:lstStyle/>
+          <a:p>
+            <a:r>
+              <a:rPr lang="en-GB" sz="800" dirty="0">
+                <a:latin typeface="Times New Roman" panose="02020603050405020304" pitchFamily="18" charset="0"/>
+                <a:cs typeface="Times New Roman" panose="02020603050405020304" pitchFamily="18" charset="0"/>
+              </a:rPr>
+              <a:t>* ALEPH, Studies of QCD at ee centre-of-mass energies between 91-GeV and 209-GeV, Eur. Phys. J. C 35, 457 (2004).</a:t>
+            </a:r>
+          </a:p>
+        </p:txBody>
+      </p:sp>
+      <p:sp>
+        <p:nvSpPr>
+          <p:cNvPr id="8" name="Right Brace 7">
+            <a:extLst>
+              <a:ext uri="{FF2B5EF4-FFF2-40B4-BE49-F238E27FC236}">
+                <a16:creationId xmlns:a16="http://schemas.microsoft.com/office/drawing/2014/main" id="{857673F1-CDEF-50E5-313C-4AF2FB780E27}"/>
+              </a:ext>
+            </a:extLst>
+          </p:cNvPr>
+          <p:cNvSpPr/>
+          <p:nvPr/>
+        </p:nvSpPr>
+        <p:spPr>
+          <a:xfrm>
+            <a:off x="3521156" y="5220182"/>
+            <a:ext cx="150471" cy="214132"/>
+          </a:xfrm>
+          <a:prstGeom prst="rightBrace">
+            <a:avLst/>
+          </a:prstGeom>
+          <a:noFill/>
+          <a:ln w="28575">
+            <a:solidFill>
+              <a:srgbClr val="C00000"/>
+            </a:solidFill>
+          </a:ln>
+        </p:spPr>
+        <p:style>
+          <a:lnRef idx="2">
+            <a:schemeClr val="accent1">
+              <a:shade val="15000"/>
+            </a:schemeClr>
+          </a:lnRef>
+          <a:fillRef idx="1">
+            <a:schemeClr val="accent1"/>
+          </a:fillRef>
+          <a:effectRef idx="0">
+            <a:schemeClr val="accent1"/>
+          </a:effectRef>
+          <a:fontRef idx="minor">
+            <a:schemeClr val="lt1"/>
+          </a:fontRef>
+        </p:style>
+        <p:txBody>
+          <a:bodyPr rtlCol="0" anchor="ctr"/>
+          <a:lstStyle/>
+          <a:p>
+            <a:pPr algn="ctr"/>
+            <a:endParaRPr lang="en-GB">
+              <a:solidFill>
+                <a:schemeClr val="lt1"/>
+              </a:solidFill>
+            </a:endParaRPr>
+          </a:p>
+        </p:txBody>
+      </p:sp>
+      <p:sp>
+        <p:nvSpPr>
+          <p:cNvPr id="11" name="Rectangle: Rounded Corners 10">
+            <a:extLst>
+              <a:ext uri="{FF2B5EF4-FFF2-40B4-BE49-F238E27FC236}">
+                <a16:creationId xmlns:a16="http://schemas.microsoft.com/office/drawing/2014/main" id="{C4064905-98C9-B718-58E9-A93B76F0F3CA}"/>
+              </a:ext>
+            </a:extLst>
+          </p:cNvPr>
+          <p:cNvSpPr/>
+          <p:nvPr/>
+        </p:nvSpPr>
+        <p:spPr>
+          <a:xfrm>
+            <a:off x="4508864" y="6180881"/>
+            <a:ext cx="1194120" cy="185405"/>
+          </a:xfrm>
+          <a:prstGeom prst="roundRect">
+            <a:avLst/>
+          </a:prstGeom>
+          <a:noFill/>
+          <a:ln w="28575">
+            <a:solidFill>
+              <a:srgbClr val="C00000"/>
+            </a:solidFill>
+          </a:ln>
+        </p:spPr>
+        <p:style>
+          <a:lnRef idx="2">
+            <a:schemeClr val="accent1">
+              <a:shade val="15000"/>
+            </a:schemeClr>
+          </a:lnRef>
+          <a:fillRef idx="1">
+            <a:schemeClr val="accent1"/>
+          </a:fillRef>
+          <a:effectRef idx="0">
+            <a:schemeClr val="accent1"/>
+          </a:effectRef>
+          <a:fontRef idx="minor">
+            <a:schemeClr val="lt1"/>
+          </a:fontRef>
+        </p:style>
+        <p:txBody>
+          <a:bodyPr rtlCol="0" anchor="ctr"/>
+          <a:lstStyle/>
+          <a:p>
+            <a:pPr algn="ctr"/>
+            <a:endParaRPr lang="en-GB"/>
+          </a:p>
+        </p:txBody>
+      </p:sp>
+      <p:cxnSp>
+        <p:nvCxnSpPr>
+          <p:cNvPr id="13" name="Straight Arrow Connector 12">
+            <a:extLst>
+              <a:ext uri="{FF2B5EF4-FFF2-40B4-BE49-F238E27FC236}">
+                <a16:creationId xmlns:a16="http://schemas.microsoft.com/office/drawing/2014/main" id="{CD65A6EF-1F09-2F3E-259A-E8389377F906}"/>
+              </a:ext>
+            </a:extLst>
+          </p:cNvPr>
+          <p:cNvCxnSpPr>
+            <a:cxnSpLocks/>
+            <a:stCxn id="8" idx="1"/>
+            <a:endCxn id="11" idx="1"/>
+          </p:cNvCxnSpPr>
+          <p:nvPr/>
+        </p:nvCxnSpPr>
+        <p:spPr>
+          <a:xfrm>
+            <a:off x="3671627" y="5327248"/>
+            <a:ext cx="837237" cy="946336"/>
+          </a:xfrm>
+          <a:prstGeom prst="straightConnector1">
+            <a:avLst/>
+          </a:prstGeom>
+          <a:ln w="38100">
+            <a:solidFill>
+              <a:srgbClr val="C00000"/>
+            </a:solidFill>
+            <a:tailEnd type="triangle"/>
+          </a:ln>
+        </p:spPr>
+        <p:style>
+          <a:lnRef idx="1">
+            <a:schemeClr val="accent1"/>
+          </a:lnRef>
+          <a:fillRef idx="0">
+            <a:schemeClr val="accent1"/>
+          </a:fillRef>
+          <a:effectRef idx="0">
+            <a:schemeClr val="accent1"/>
+          </a:effectRef>
+          <a:fontRef idx="minor">
+            <a:schemeClr val="tx1"/>
+          </a:fontRef>
+        </p:style>
+      </p:cxnSp>
+      <p:pic>
+        <p:nvPicPr>
+          <p:cNvPr id="22" name="Picture 21">
+            <a:extLst>
+              <a:ext uri="{FF2B5EF4-FFF2-40B4-BE49-F238E27FC236}">
+                <a16:creationId xmlns:a16="http://schemas.microsoft.com/office/drawing/2014/main" id="{542ED28C-94C4-1F42-33A9-F148F8960D04}"/>
+              </a:ext>
+            </a:extLst>
+          </p:cNvPr>
+          <p:cNvPicPr>
+            <a:picLocks noChangeAspect="1"/>
+          </p:cNvPicPr>
+          <p:nvPr/>
+        </p:nvPicPr>
+        <p:blipFill>
+          <a:blip r:embed="rId4"/>
+          <a:stretch>
+            <a:fillRect/>
+          </a:stretch>
+        </p:blipFill>
+        <p:spPr>
+          <a:xfrm>
+            <a:off x="8134931" y="1873378"/>
+            <a:ext cx="3876155" cy="3038194"/>
+          </a:xfrm>
+          <a:prstGeom prst="rect">
+            <a:avLst/>
+          </a:prstGeom>
+          <a:ln w="28575">
+            <a:solidFill>
+              <a:srgbClr val="C00000"/>
+            </a:solidFill>
+          </a:ln>
+        </p:spPr>
+      </p:pic>
+      <p:cxnSp>
+        <p:nvCxnSpPr>
+          <p:cNvPr id="24" name="Connector: Elbow 23">
+            <a:extLst>
+              <a:ext uri="{FF2B5EF4-FFF2-40B4-BE49-F238E27FC236}">
+                <a16:creationId xmlns:a16="http://schemas.microsoft.com/office/drawing/2014/main" id="{4DC9F3B8-C496-833C-FFA8-BFA17FE084D3}"/>
+              </a:ext>
+            </a:extLst>
+          </p:cNvPr>
+          <p:cNvCxnSpPr>
+            <a:cxnSpLocks/>
+            <a:stCxn id="11" idx="2"/>
+            <a:endCxn id="22" idx="2"/>
+          </p:cNvCxnSpPr>
+          <p:nvPr/>
+        </p:nvCxnSpPr>
+        <p:spPr>
+          <a:xfrm rot="5400000" flipH="1" flipV="1">
+            <a:off x="6862109" y="3155386"/>
+            <a:ext cx="1454714" cy="4967085"/>
+          </a:xfrm>
+          <a:prstGeom prst="bentConnector3">
+            <a:avLst>
+              <a:gd name="adj1" fmla="val -15714"/>
+            </a:avLst>
+          </a:prstGeom>
+          <a:ln w="38100">
+            <a:solidFill>
+              <a:srgbClr val="C00000"/>
             </a:solidFill>
             <a:tailEnd type="triangle"/>
           </a:ln>
@@ -6362,7 +7836,7 @@
         <p:cNvPr id="1" name="">
           <a:extLst>
             <a:ext uri="{FF2B5EF4-FFF2-40B4-BE49-F238E27FC236}">
-              <a16:creationId xmlns:a16="http://schemas.microsoft.com/office/drawing/2014/main" id="{257A479A-62CE-DC6E-749F-0503909776FF}"/>
+              <a16:creationId xmlns:a16="http://schemas.microsoft.com/office/drawing/2014/main" id="{420E5700-FCD7-A280-AC7A-66985E5F6411}"/>
             </a:ext>
           </a:extLst>
         </p:cNvPr>
@@ -6377,12 +7851,42 @@
           <a:chExt cx="0" cy="0"/>
         </a:xfrm>
       </p:grpSpPr>
+      <p:pic>
+        <p:nvPicPr>
+          <p:cNvPr id="17" name="Picture 16">
+            <a:extLst>
+              <a:ext uri="{FF2B5EF4-FFF2-40B4-BE49-F238E27FC236}">
+                <a16:creationId xmlns:a16="http://schemas.microsoft.com/office/drawing/2014/main" id="{DDE2750D-35B7-0BA8-5741-01560B3BDAC4}"/>
+              </a:ext>
+            </a:extLst>
+          </p:cNvPr>
+          <p:cNvPicPr>
+            <a:picLocks noChangeAspect="1"/>
+          </p:cNvPicPr>
+          <p:nvPr/>
+        </p:nvPicPr>
+        <p:blipFill>
+          <a:blip r:embed="rId2"/>
+          <a:stretch>
+            <a:fillRect/>
+          </a:stretch>
+        </p:blipFill>
+        <p:spPr>
+          <a:xfrm>
+            <a:off x="206476" y="1571261"/>
+            <a:ext cx="5066518" cy="4548852"/>
+          </a:xfrm>
+          <a:prstGeom prst="rect">
+            <a:avLst/>
+          </a:prstGeom>
+        </p:spPr>
+      </p:pic>
       <p:sp>
         <p:nvSpPr>
           <p:cNvPr id="5" name="Title 4">
             <a:extLst>
               <a:ext uri="{FF2B5EF4-FFF2-40B4-BE49-F238E27FC236}">
-                <a16:creationId xmlns:a16="http://schemas.microsoft.com/office/drawing/2014/main" id="{506A551D-4ACA-0242-CF27-CC4BAC06B98D}"/>
+                <a16:creationId xmlns:a16="http://schemas.microsoft.com/office/drawing/2014/main" id="{9A17505C-1F73-72FB-929E-50574761E3C1}"/>
               </a:ext>
             </a:extLst>
           </p:cNvPr>
@@ -6411,9 +7915,9 @@
                 <a:ea typeface="Arial Unicode MS" panose="020B0604020202020204" pitchFamily="34" charset="-128"/>
                 <a:cs typeface="Times New Roman" panose="02020603050405020304" pitchFamily="18" charset="0"/>
               </a:rPr>
-              <a:t>Summary of questions</a:t>
-            </a:r>
-            <a:endParaRPr lang="en-IN" sz="2800" b="1" dirty="0">
+              <a:t>Energy evolution – Code</a:t>
+            </a:r>
+            <a:endParaRPr lang="en-IN" sz="2800" b="1" baseline="-25000" dirty="0">
               <a:latin typeface="Times New Roman" panose="02020603050405020304" pitchFamily="18" charset="0"/>
               <a:ea typeface="Arial Unicode MS" panose="020B0604020202020204" pitchFamily="34" charset="-128"/>
               <a:cs typeface="Times New Roman" panose="02020603050405020304" pitchFamily="18" charset="0"/>
@@ -6421,170 +7925,203 @@
           </a:p>
         </p:txBody>
       </p:sp>
-      <p:sp>
-        <p:nvSpPr>
-          <p:cNvPr id="6" name="Content Placeholder 5">
+      <p:pic>
+        <p:nvPicPr>
+          <p:cNvPr id="6" name="Picture 5">
             <a:extLst>
               <a:ext uri="{FF2B5EF4-FFF2-40B4-BE49-F238E27FC236}">
-                <a16:creationId xmlns:a16="http://schemas.microsoft.com/office/drawing/2014/main" id="{C5E1CD0A-8113-9427-0839-D10BBC30F2B2}"/>
+                <a16:creationId xmlns:a16="http://schemas.microsoft.com/office/drawing/2014/main" id="{820A7B26-9877-B096-5650-27666B8202D4}"/>
               </a:ext>
             </a:extLst>
           </p:cNvPr>
-          <p:cNvSpPr>
-            <a:spLocks noGrp="1"/>
-          </p:cNvSpPr>
-          <p:nvPr>
-            <p:ph idx="1"/>
-          </p:nvPr>
-        </p:nvSpPr>
-        <p:spPr>
-          <a:xfrm>
-            <a:off x="206476" y="1064608"/>
-            <a:ext cx="5889524" cy="5571142"/>
-          </a:xfrm>
-        </p:spPr>
-        <p:txBody>
-          <a:bodyPr>
-            <a:noAutofit/>
+          <p:cNvPicPr>
+            <a:picLocks noChangeAspect="1"/>
+          </p:cNvPicPr>
+          <p:nvPr/>
+        </p:nvPicPr>
+        <p:blipFill>
+          <a:blip r:embed="rId3"/>
+          <a:stretch>
+            <a:fillRect/>
+          </a:stretch>
+        </p:blipFill>
+        <p:spPr>
+          <a:xfrm>
+            <a:off x="5952819" y="2582819"/>
+            <a:ext cx="5864933" cy="2525733"/>
+          </a:xfrm>
+          <a:prstGeom prst="rect">
+            <a:avLst/>
+          </a:prstGeom>
+          <a:ln w="28575">
+            <a:solidFill>
+              <a:srgbClr val="C00000"/>
+            </a:solidFill>
+          </a:ln>
+        </p:spPr>
+      </p:pic>
+      <p:sp>
+        <p:nvSpPr>
+          <p:cNvPr id="14" name="Rectangle: Rounded Corners 13">
+            <a:extLst>
+              <a:ext uri="{FF2B5EF4-FFF2-40B4-BE49-F238E27FC236}">
+                <a16:creationId xmlns:a16="http://schemas.microsoft.com/office/drawing/2014/main" id="{8467369B-A979-69D2-2888-8FD51365B414}"/>
+              </a:ext>
+            </a:extLst>
+          </p:cNvPr>
+          <p:cNvSpPr/>
+          <p:nvPr/>
+        </p:nvSpPr>
+        <p:spPr>
+          <a:xfrm>
+            <a:off x="374248" y="3385595"/>
+            <a:ext cx="2594658" cy="460094"/>
+          </a:xfrm>
+          <a:prstGeom prst="roundRect">
+            <a:avLst/>
+          </a:prstGeom>
+          <a:noFill/>
+          <a:ln w="28575">
+            <a:solidFill>
+              <a:srgbClr val="C00000"/>
+            </a:solidFill>
+          </a:ln>
+        </p:spPr>
+        <p:style>
+          <a:lnRef idx="2">
+            <a:schemeClr val="accent1">
+              <a:shade val="15000"/>
+            </a:schemeClr>
+          </a:lnRef>
+          <a:fillRef idx="1">
+            <a:schemeClr val="accent1"/>
+          </a:fillRef>
+          <a:effectRef idx="0">
+            <a:schemeClr val="accent1"/>
+          </a:effectRef>
+          <a:fontRef idx="minor">
+            <a:schemeClr val="lt1"/>
+          </a:fontRef>
+        </p:style>
+        <p:txBody>
+          <a:bodyPr rtlCol="0" anchor="ctr"/>
+          <a:lstStyle/>
+          <a:p>
+            <a:pPr algn="ctr"/>
+            <a:endParaRPr lang="en-GB"/>
+          </a:p>
+        </p:txBody>
+      </p:sp>
+      <p:cxnSp>
+        <p:nvCxnSpPr>
+          <p:cNvPr id="19" name="Connector: Elbow 18">
+            <a:extLst>
+              <a:ext uri="{FF2B5EF4-FFF2-40B4-BE49-F238E27FC236}">
+                <a16:creationId xmlns:a16="http://schemas.microsoft.com/office/drawing/2014/main" id="{ED8AE99A-6A3D-7E5C-0E9B-A2E736DC07E9}"/>
+              </a:ext>
+            </a:extLst>
+          </p:cNvPr>
+          <p:cNvCxnSpPr>
+            <a:cxnSpLocks/>
+            <a:stCxn id="14" idx="2"/>
+            <a:endCxn id="6" idx="1"/>
+          </p:cNvCxnSpPr>
+          <p:nvPr/>
+        </p:nvCxnSpPr>
+        <p:spPr>
+          <a:xfrm rot="5400000" flipH="1" flipV="1">
+            <a:off x="3812196" y="1705067"/>
+            <a:ext cx="3" cy="4281242"/>
+          </a:xfrm>
+          <a:prstGeom prst="bentConnector4">
+            <a:avLst>
+              <a:gd name="adj1" fmla="val -7620000000"/>
+              <a:gd name="adj2" fmla="val 87861"/>
+            </a:avLst>
+          </a:prstGeom>
+          <a:ln w="38100">
+            <a:solidFill>
+              <a:srgbClr val="C00000"/>
+            </a:solidFill>
+            <a:tailEnd type="triangle"/>
+          </a:ln>
+        </p:spPr>
+        <p:style>
+          <a:lnRef idx="1">
+            <a:schemeClr val="accent1"/>
+          </a:lnRef>
+          <a:fillRef idx="0">
+            <a:schemeClr val="accent1"/>
+          </a:fillRef>
+          <a:effectRef idx="0">
+            <a:schemeClr val="accent1"/>
+          </a:effectRef>
+          <a:fontRef idx="minor">
+            <a:schemeClr val="tx1"/>
+          </a:fontRef>
+        </p:style>
+      </p:cxnSp>
+      <p:sp>
+        <p:nvSpPr>
+          <p:cNvPr id="26" name="TextBox 25">
+            <a:extLst>
+              <a:ext uri="{FF2B5EF4-FFF2-40B4-BE49-F238E27FC236}">
+                <a16:creationId xmlns:a16="http://schemas.microsoft.com/office/drawing/2014/main" id="{367250C0-D6AE-A6DF-7BEF-70F0ABFB7FB8}"/>
+              </a:ext>
+            </a:extLst>
+          </p:cNvPr>
+          <p:cNvSpPr txBox="1"/>
+          <p:nvPr/>
+        </p:nvSpPr>
+        <p:spPr>
+          <a:xfrm>
+            <a:off x="6495211" y="2104089"/>
+            <a:ext cx="4780148" cy="307777"/>
+          </a:xfrm>
+          <a:prstGeom prst="rect">
+            <a:avLst/>
+          </a:prstGeom>
+          <a:noFill/>
+        </p:spPr>
+        <p:txBody>
+          <a:bodyPr wrap="square" rtlCol="0">
+            <a:spAutoFit/>
           </a:bodyPr>
           <a:lstStyle/>
           <a:p>
-            <a:pPr>
-              <a:spcAft>
-                <a:spcPts val="600"/>
-              </a:spcAft>
-            </a:pPr>
-            <a:r>
-              <a:rPr lang="en-US" sz="1400" dirty="0">
-                <a:latin typeface="Times New Roman" panose="02020603050405020304" pitchFamily="18" charset="0"/>
-                <a:ea typeface="Arial Unicode MS" panose="020B0604020202020204" pitchFamily="34" charset="-128"/>
-                <a:cs typeface="Times New Roman" panose="02020603050405020304" pitchFamily="18" charset="0"/>
-              </a:rPr>
-              <a:t>Regarding Topic 1:</a:t>
-            </a:r>
-          </a:p>
-          <a:p>
-            <a:pPr lvl="1">
-              <a:spcAft>
-                <a:spcPts val="600"/>
-              </a:spcAft>
-            </a:pPr>
-            <a:r>
-              <a:rPr lang="en-GB" sz="1400" dirty="0">
-                <a:latin typeface="Times New Roman" panose="02020603050405020304" pitchFamily="18" charset="0"/>
-                <a:cs typeface="Times New Roman" panose="02020603050405020304" pitchFamily="18" charset="0"/>
-              </a:rPr>
-              <a:t>Question 1.1</a:t>
-            </a:r>
-          </a:p>
-          <a:p>
-            <a:pPr lvl="1">
-              <a:spcAft>
-                <a:spcPts val="600"/>
-              </a:spcAft>
-            </a:pPr>
-            <a:r>
-              <a:rPr lang="en-GB" sz="1400" dirty="0">
-                <a:latin typeface="Times New Roman" panose="02020603050405020304" pitchFamily="18" charset="0"/>
-                <a:cs typeface="Times New Roman" panose="02020603050405020304" pitchFamily="18" charset="0"/>
-              </a:rPr>
-              <a:t>Question 1.2</a:t>
-            </a:r>
-          </a:p>
-          <a:p>
-            <a:pPr>
-              <a:spcAft>
-                <a:spcPts val="600"/>
-              </a:spcAft>
-            </a:pPr>
-            <a:r>
-              <a:rPr lang="en-US" sz="1400" dirty="0">
-                <a:latin typeface="Times New Roman" panose="02020603050405020304" pitchFamily="18" charset="0"/>
-                <a:ea typeface="Arial Unicode MS" panose="020B0604020202020204" pitchFamily="34" charset="-128"/>
-                <a:cs typeface="Times New Roman" panose="02020603050405020304" pitchFamily="18" charset="0"/>
-              </a:rPr>
-              <a:t>Regarding Topic 2:</a:t>
-            </a:r>
-          </a:p>
-          <a:p>
-            <a:pPr lvl="1">
-              <a:spcAft>
-                <a:spcPts val="600"/>
-              </a:spcAft>
-            </a:pPr>
-            <a:r>
-              <a:rPr lang="en-GB" sz="1400" dirty="0">
-                <a:latin typeface="Times New Roman" panose="02020603050405020304" pitchFamily="18" charset="0"/>
-                <a:cs typeface="Times New Roman" panose="02020603050405020304" pitchFamily="18" charset="0"/>
-              </a:rPr>
-              <a:t>Question 2.1</a:t>
-            </a:r>
-          </a:p>
-          <a:p>
-            <a:pPr lvl="1">
-              <a:spcAft>
-                <a:spcPts val="600"/>
-              </a:spcAft>
-            </a:pPr>
-            <a:r>
-              <a:rPr lang="en-GB" sz="1400" dirty="0">
-                <a:latin typeface="Times New Roman" panose="02020603050405020304" pitchFamily="18" charset="0"/>
-                <a:cs typeface="Times New Roman" panose="02020603050405020304" pitchFamily="18" charset="0"/>
-              </a:rPr>
-              <a:t>Question 2.2</a:t>
-            </a:r>
-          </a:p>
-          <a:p>
-            <a:pPr>
-              <a:spcAft>
-                <a:spcPts val="600"/>
-              </a:spcAft>
-            </a:pPr>
-            <a:r>
-              <a:rPr lang="en-US" sz="1400" dirty="0">
-                <a:latin typeface="Times New Roman" panose="02020603050405020304" pitchFamily="18" charset="0"/>
-                <a:ea typeface="Arial Unicode MS" panose="020B0604020202020204" pitchFamily="34" charset="-128"/>
-                <a:cs typeface="Times New Roman" panose="02020603050405020304" pitchFamily="18" charset="0"/>
-              </a:rPr>
-              <a:t>Regarding fit windows:</a:t>
-            </a:r>
-          </a:p>
-          <a:p>
-            <a:pPr lvl="1">
-              <a:spcAft>
-                <a:spcPts val="600"/>
-              </a:spcAft>
-            </a:pPr>
-            <a:r>
-              <a:rPr lang="en-US" sz="1400" dirty="0">
-                <a:latin typeface="Times New Roman" panose="02020603050405020304" pitchFamily="18" charset="0"/>
-                <a:ea typeface="Arial Unicode MS" panose="020B0604020202020204" pitchFamily="34" charset="-128"/>
-                <a:cs typeface="Times New Roman" panose="02020603050405020304" pitchFamily="18" charset="0"/>
-              </a:rPr>
-              <a:t>ALEPH ranges were used as baseline</a:t>
-            </a:r>
-          </a:p>
-          <a:p>
-            <a:pPr lvl="1">
-              <a:spcAft>
-                <a:spcPts val="600"/>
-              </a:spcAft>
-            </a:pPr>
-            <a:r>
-              <a:rPr lang="en-US" sz="1400" dirty="0">
-                <a:latin typeface="Times New Roman" panose="02020603050405020304" pitchFamily="18" charset="0"/>
-                <a:ea typeface="Arial Unicode MS" panose="020B0604020202020204" pitchFamily="34" charset="-128"/>
-                <a:cs typeface="Times New Roman" panose="02020603050405020304" pitchFamily="18" charset="0"/>
-              </a:rPr>
-              <a:t>Z-pole window needed to be shortened</a:t>
-            </a:r>
+            <a:pPr algn="ctr"/>
+            <a:r>
+              <a:rPr lang="en-US" sz="1400" b="1" dirty="0">
+                <a:latin typeface="Times New Roman" panose="02020603050405020304" pitchFamily="18" charset="0"/>
+                <a:cs typeface="Times New Roman" panose="02020603050405020304" pitchFamily="18" charset="0"/>
+              </a:rPr>
+              <a:t>Constructing 3-loop running with </a:t>
+            </a:r>
+            <a:r>
+              <a:rPr lang="el-GR" sz="1400" b="1" dirty="0">
+                <a:latin typeface="Times New Roman" panose="02020603050405020304" pitchFamily="18" charset="0"/>
+                <a:cs typeface="Times New Roman" panose="02020603050405020304" pitchFamily="18" charset="0"/>
+              </a:rPr>
+              <a:t>Λ</a:t>
+            </a:r>
+            <a:r>
+              <a:rPr lang="en-US" sz="1400" b="1" dirty="0">
+                <a:latin typeface="Times New Roman" panose="02020603050405020304" pitchFamily="18" charset="0"/>
+                <a:cs typeface="Times New Roman" panose="02020603050405020304" pitchFamily="18" charset="0"/>
+              </a:rPr>
+              <a:t> band similar to ALEPH</a:t>
+            </a:r>
+            <a:endParaRPr lang="en-GB" sz="1400" b="1" dirty="0">
+              <a:latin typeface="Times New Roman" panose="02020603050405020304" pitchFamily="18" charset="0"/>
+              <a:cs typeface="Times New Roman" panose="02020603050405020304" pitchFamily="18" charset="0"/>
+            </a:endParaRPr>
           </a:p>
         </p:txBody>
       </p:sp>
     </p:spTree>
     <p:extLst>
       <p:ext uri="{BB962C8B-B14F-4D97-AF65-F5344CB8AC3E}">
-        <p14:creationId xmlns:p14="http://schemas.microsoft.com/office/powerpoint/2010/main" val="3322251253"/>
+        <p14:creationId xmlns:p14="http://schemas.microsoft.com/office/powerpoint/2010/main" val="3306072213"/>
       </p:ext>
     </p:extLst>
   </p:cSld>
